--- a/master_template.pptx
+++ b/master_template.pptx
@@ -2,28 +2,28 @@
 <file path=ppt/presentation.xml><?xml version="1.0" encoding="utf-8"?>
 <p:presentation xmlns:a="http://schemas.openxmlformats.org/drawingml/2006/main" xmlns:r="http://schemas.openxmlformats.org/officeDocument/2006/relationships" xmlns:mc="http://schemas.openxmlformats.org/markup-compatibility/2006" xmlns:mv="urn:schemas-microsoft-com:mac:vml" xmlns:p="http://schemas.openxmlformats.org/presentationml/2006/main" xmlns:c="http://schemas.openxmlformats.org/drawingml/2006/chart" xmlns:dgm="http://schemas.openxmlformats.org/drawingml/2006/diagram" xmlns:o="urn:schemas-microsoft-com:office:office" xmlns:v="urn:schemas-microsoft-com:vml" xmlns:pvml="urn:schemas-microsoft-com:office:powerpoint" xmlns:com="http://schemas.openxmlformats.org/drawingml/2006/compatibility" xmlns:p14="http://schemas.microsoft.com/office/powerpoint/2010/main" xmlns:p15="http://schemas.microsoft.com/office/powerpoint/2012/main" xmlns:ahyp="http://schemas.microsoft.com/office/drawing/2018/hyperlinkcolor" autoCompressPictures="0" strictFirstAndLastChars="0" saveSubsetFonts="1">
   <p:sldMasterIdLst>
-    <p:sldMasterId id="2147483658" r:id="rId5"/>
+    <p:sldMasterId id="2147483658" r:id="rId4"/>
   </p:sldMasterIdLst>
   <p:notesMasterIdLst>
-    <p:notesMasterId r:id="rId6"/>
+    <p:notesMasterId r:id="rId5"/>
   </p:notesMasterIdLst>
   <p:sldIdLst>
-    <p:sldId id="256" r:id="rId7"/>
-    <p:sldId id="257" r:id="rId8"/>
-    <p:sldId id="258" r:id="rId9"/>
-    <p:sldId id="259" r:id="rId10"/>
-    <p:sldId id="260" r:id="rId11"/>
-    <p:sldId id="261" r:id="rId12"/>
-    <p:sldId id="262" r:id="rId13"/>
-    <p:sldId id="263" r:id="rId14"/>
-    <p:sldId id="264" r:id="rId15"/>
-    <p:sldId id="265" r:id="rId16"/>
-    <p:sldId id="266" r:id="rId17"/>
-    <p:sldId id="267" r:id="rId18"/>
-    <p:sldId id="268" r:id="rId19"/>
-    <p:sldId id="269" r:id="rId20"/>
-    <p:sldId id="270" r:id="rId21"/>
-    <p:sldId id="271" r:id="rId22"/>
+    <p:sldId id="256" r:id="rId6"/>
+    <p:sldId id="257" r:id="rId7"/>
+    <p:sldId id="258" r:id="rId8"/>
+    <p:sldId id="259" r:id="rId9"/>
+    <p:sldId id="260" r:id="rId10"/>
+    <p:sldId id="261" r:id="rId11"/>
+    <p:sldId id="262" r:id="rId12"/>
+    <p:sldId id="263" r:id="rId13"/>
+    <p:sldId id="264" r:id="rId14"/>
+    <p:sldId id="265" r:id="rId15"/>
+    <p:sldId id="266" r:id="rId16"/>
+    <p:sldId id="267" r:id="rId17"/>
+    <p:sldId id="268" r:id="rId18"/>
+    <p:sldId id="269" r:id="rId19"/>
+    <p:sldId id="270" r:id="rId20"/>
+    <p:sldId id="271" r:id="rId21"/>
   </p:sldIdLst>
   <p:sldSz cy="5143500" cx="9144000"/>
   <p:notesSz cx="6858000" cy="9144000"/>
@@ -273,22 +273,6 @@
     </p:ext>
   </p:extLst>
 </p:presentation>
-</file>
-
-<file path=ppt/commentAuthors.xml><?xml version="1.0" encoding="utf-8"?>
-<p:cmAuthorLst xmlns:a="http://schemas.openxmlformats.org/drawingml/2006/main" xmlns:r="http://schemas.openxmlformats.org/officeDocument/2006/relationships" xmlns:mc="http://schemas.openxmlformats.org/markup-compatibility/2006" xmlns:mv="urn:schemas-microsoft-com:mac:vml" xmlns:p="http://schemas.openxmlformats.org/presentationml/2006/main" xmlns:c="http://schemas.openxmlformats.org/drawingml/2006/chart" xmlns:dgm="http://schemas.openxmlformats.org/drawingml/2006/diagram" xmlns:o="urn:schemas-microsoft-com:office:office" xmlns:v="urn:schemas-microsoft-com:vml" xmlns:pvml="urn:schemas-microsoft-com:office:powerpoint" xmlns:com="http://schemas.openxmlformats.org/drawingml/2006/compatibility" xmlns:p14="http://schemas.microsoft.com/office/powerpoint/2010/main" xmlns:p15="http://schemas.microsoft.com/office/powerpoint/2012/main" xmlns:ahyp="http://schemas.microsoft.com/office/drawing/2018/hyperlinkcolor">
-  <p:cmAuthor clrIdx="0" id="0" initials="" lastIdx="1" name=""/>
-</p:cmAuthorLst>
-</file>
-
-<file path=ppt/comments/comment1.xml><?xml version="1.0" encoding="utf-8"?>
-<p:cmLst xmlns:a="http://schemas.openxmlformats.org/drawingml/2006/main" xmlns:r="http://schemas.openxmlformats.org/officeDocument/2006/relationships" xmlns:mc="http://schemas.openxmlformats.org/markup-compatibility/2006" xmlns:mv="urn:schemas-microsoft-com:mac:vml" xmlns:p="http://schemas.openxmlformats.org/presentationml/2006/main" xmlns:c="http://schemas.openxmlformats.org/drawingml/2006/chart" xmlns:dgm="http://schemas.openxmlformats.org/drawingml/2006/diagram" xmlns:o="urn:schemas-microsoft-com:office:office" xmlns:v="urn:schemas-microsoft-com:vml" xmlns:pvml="urn:schemas-microsoft-com:office:powerpoint" xmlns:com="http://schemas.openxmlformats.org/drawingml/2006/compatibility" xmlns:p14="http://schemas.microsoft.com/office/powerpoint/2010/main" xmlns:p15="http://schemas.microsoft.com/office/powerpoint/2012/main" xmlns:ahyp="http://schemas.microsoft.com/office/drawing/2018/hyperlinkcolor">
-  <p:cm authorId="0" idx="1" dt="2026-03-25T13:27:08.440">
-    <p:pos x="6000" y="0"/>
-    <p:text>sign add
--Tikona Capital</p:text>
-  </p:cm>
-</p:cmLst>
 </file>
 
 <file path=ppt/notesMasters/notesMaster1.xml><?xml version="1.0" encoding="utf-8"?>
@@ -10436,7 +10420,7 @@
         </p:nvSpPr>
         <p:spPr>
           <a:xfrm>
-            <a:off x="311700" y="154025"/>
+            <a:off x="311700" y="139700"/>
             <a:ext cx="8520600" cy="2052600"/>
           </a:xfrm>
           <a:prstGeom prst="rect">
@@ -10473,7 +10457,7 @@
               <a:buNone/>
             </a:pPr>
             <a:r>
-              <a:rPr b="1" i="0" lang="en-GB" sz="4000" u="none" cap="none" strike="noStrike">
+              <a:rPr b="1" i="0" lang="en-GB" sz="3500" u="none" cap="none" strike="noStrike">
                 <a:solidFill>
                   <a:schemeClr val="lt1"/>
                 </a:solidFill>
@@ -10484,7 +10468,7 @@
               </a:rPr>
               <a:t>{{company_name}}</a:t>
             </a:r>
-            <a:endParaRPr b="1" i="0" sz="4000" u="none" cap="none" strike="noStrike">
+            <a:endParaRPr b="1" i="0" sz="3500" u="none" cap="none" strike="noStrike">
               <a:solidFill>
                 <a:schemeClr val="lt1"/>
               </a:solidFill>
@@ -10549,7 +10533,7 @@
               <a:buNone/>
             </a:pPr>
             <a:r>
-              <a:rPr b="1" i="0" lang="en-GB" sz="1375" u="none" cap="none" strike="noStrike">
+              <a:rPr b="1" i="0" lang="en-GB" sz="1400" u="none" cap="none" strike="noStrike">
                 <a:solidFill>
                   <a:schemeClr val="dk1"/>
                 </a:solidFill>
@@ -10558,30 +10542,10 @@
                 <a:cs typeface="Calibri"/>
                 <a:sym typeface="Calibri"/>
               </a:rPr>
-              <a:t>NSE:{{nse_symbol}} | BOM:{{bom_code}} | Rating: {{recommendation}} </a:t>
+              <a:t>NSE: </a:t>
             </a:r>
-            <a:endParaRPr/>
-          </a:p>
-          <a:p>
-            <a:pPr indent="0" lvl="0" marL="0" marR="0" rtl="0" algn="ctr">
-              <a:lnSpc>
-                <a:spcPct val="95000"/>
-              </a:lnSpc>
-              <a:spcBef>
-                <a:spcPts val="0"/>
-              </a:spcBef>
-              <a:spcAft>
-                <a:spcPts val="0"/>
-              </a:spcAft>
-              <a:buClr>
-                <a:schemeClr val="dk2"/>
-              </a:buClr>
-              <a:buSzPts val="744"/>
-              <a:buFont typeface="Arial"/>
-              <a:buNone/>
-            </a:pPr>
             <a:r>
-              <a:rPr b="1" i="0" lang="en-GB" sz="1375" u="none" cap="none" strike="noStrike">
+              <a:rPr i="0" lang="en-GB" sz="1400" u="none" cap="none" strike="noStrike">
                 <a:solidFill>
                   <a:schemeClr val="dk1"/>
                 </a:solidFill>
@@ -10590,9 +10554,178 @@
                 <a:cs typeface="Calibri"/>
                 <a:sym typeface="Calibri"/>
               </a:rPr>
-              <a:t>Market Cap: ₹{{market_cap}} Cr|Market Cap Category: {{market_cap_category}}|CMP: ₹{{current_market_price}}</a:t>
+              <a:t>{{nse_symbol}}</a:t>
             </a:r>
-            <a:endParaRPr b="1" i="0" sz="1375" u="none" cap="none" strike="noStrike">
+            <a:r>
+              <a:rPr b="1" i="0" lang="en-GB" sz="1400" u="none" cap="none" strike="noStrike">
+                <a:solidFill>
+                  <a:schemeClr val="dk1"/>
+                </a:solidFill>
+                <a:latin typeface="Calibri"/>
+                <a:ea typeface="Calibri"/>
+                <a:cs typeface="Calibri"/>
+                <a:sym typeface="Calibri"/>
+              </a:rPr>
+              <a:t> | BOM: </a:t>
+            </a:r>
+            <a:r>
+              <a:rPr i="0" lang="en-GB" sz="1400" u="none" cap="none" strike="noStrike">
+                <a:solidFill>
+                  <a:schemeClr val="dk1"/>
+                </a:solidFill>
+                <a:latin typeface="Calibri"/>
+                <a:ea typeface="Calibri"/>
+                <a:cs typeface="Calibri"/>
+                <a:sym typeface="Calibri"/>
+              </a:rPr>
+              <a:t>{{bom_code}}</a:t>
+            </a:r>
+            <a:r>
+              <a:rPr b="1" i="0" lang="en-GB" sz="1400" u="none" cap="none" strike="noStrike">
+                <a:solidFill>
+                  <a:schemeClr val="dk1"/>
+                </a:solidFill>
+                <a:latin typeface="Calibri"/>
+                <a:ea typeface="Calibri"/>
+                <a:cs typeface="Calibri"/>
+                <a:sym typeface="Calibri"/>
+              </a:rPr>
+              <a:t> | Rating: </a:t>
+            </a:r>
+            <a:r>
+              <a:rPr i="0" lang="en-GB" sz="1400" u="none" cap="none" strike="noStrike">
+                <a:solidFill>
+                  <a:schemeClr val="dk1"/>
+                </a:solidFill>
+                <a:latin typeface="Calibri"/>
+                <a:ea typeface="Calibri"/>
+                <a:cs typeface="Calibri"/>
+                <a:sym typeface="Calibri"/>
+              </a:rPr>
+              <a:t>{{</a:t>
+            </a:r>
+            <a:r>
+              <a:rPr lang="en-GB" sz="1400">
+                <a:solidFill>
+                  <a:schemeClr val="dk1"/>
+                </a:solidFill>
+                <a:latin typeface="Calibri"/>
+                <a:ea typeface="Calibri"/>
+                <a:cs typeface="Calibri"/>
+                <a:sym typeface="Calibri"/>
+              </a:rPr>
+              <a:t>rating</a:t>
+            </a:r>
+            <a:r>
+              <a:rPr i="0" lang="en-GB" sz="1400" u="none" cap="none" strike="noStrike">
+                <a:solidFill>
+                  <a:schemeClr val="dk1"/>
+                </a:solidFill>
+                <a:latin typeface="Calibri"/>
+                <a:ea typeface="Calibri"/>
+                <a:cs typeface="Calibri"/>
+                <a:sym typeface="Calibri"/>
+              </a:rPr>
+              <a:t>}} </a:t>
+            </a:r>
+            <a:endParaRPr sz="1400">
+              <a:latin typeface="Calibri"/>
+              <a:ea typeface="Calibri"/>
+              <a:cs typeface="Calibri"/>
+              <a:sym typeface="Calibri"/>
+            </a:endParaRPr>
+          </a:p>
+          <a:p>
+            <a:pPr indent="0" lvl="0" marL="0" marR="0" rtl="0" algn="ctr">
+              <a:lnSpc>
+                <a:spcPct val="95000"/>
+              </a:lnSpc>
+              <a:spcBef>
+                <a:spcPts val="0"/>
+              </a:spcBef>
+              <a:spcAft>
+                <a:spcPts val="0"/>
+              </a:spcAft>
+              <a:buClr>
+                <a:schemeClr val="dk2"/>
+              </a:buClr>
+              <a:buSzPts val="744"/>
+              <a:buFont typeface="Arial"/>
+              <a:buNone/>
+            </a:pPr>
+            <a:r>
+              <a:rPr b="1" i="0" lang="en-GB" sz="1400" u="none" cap="none" strike="noStrike">
+                <a:solidFill>
+                  <a:schemeClr val="dk1"/>
+                </a:solidFill>
+                <a:latin typeface="Calibri"/>
+                <a:ea typeface="Calibri"/>
+                <a:cs typeface="Calibri"/>
+                <a:sym typeface="Calibri"/>
+              </a:rPr>
+              <a:t>Market Cap: </a:t>
+            </a:r>
+            <a:r>
+              <a:rPr i="0" lang="en-GB" sz="1400" u="none" cap="none" strike="noStrike">
+                <a:solidFill>
+                  <a:schemeClr val="dk1"/>
+                </a:solidFill>
+                <a:latin typeface="Calibri"/>
+                <a:ea typeface="Calibri"/>
+                <a:cs typeface="Calibri"/>
+                <a:sym typeface="Calibri"/>
+              </a:rPr>
+              <a:t>₹{{market_cap}} Cr</a:t>
+            </a:r>
+            <a:r>
+              <a:rPr b="1" i="0" lang="en-GB" sz="1400" u="none" cap="none" strike="noStrike">
+                <a:solidFill>
+                  <a:schemeClr val="dk1"/>
+                </a:solidFill>
+                <a:latin typeface="Calibri"/>
+                <a:ea typeface="Calibri"/>
+                <a:cs typeface="Calibri"/>
+                <a:sym typeface="Calibri"/>
+              </a:rPr>
+              <a:t>|Market Cap Category: </a:t>
+            </a:r>
+            <a:r>
+              <a:rPr i="0" lang="en-GB" sz="1400" u="none" cap="none" strike="noStrike">
+                <a:solidFill>
+                  <a:schemeClr val="dk1"/>
+                </a:solidFill>
+                <a:latin typeface="Calibri"/>
+                <a:ea typeface="Calibri"/>
+                <a:cs typeface="Calibri"/>
+                <a:sym typeface="Calibri"/>
+              </a:rPr>
+              <a:t>{{market_cap_category}}</a:t>
+            </a:r>
+            <a:r>
+              <a:rPr b="1" i="0" lang="en-GB" sz="1400" u="none" cap="none" strike="noStrike">
+                <a:solidFill>
+                  <a:schemeClr val="dk1"/>
+                </a:solidFill>
+                <a:latin typeface="Calibri"/>
+                <a:ea typeface="Calibri"/>
+                <a:cs typeface="Calibri"/>
+                <a:sym typeface="Calibri"/>
+              </a:rPr>
+              <a:t>|CMP: </a:t>
+            </a:r>
+            <a:r>
+              <a:rPr i="0" lang="en-GB" sz="1400" u="none" cap="none" strike="noStrike">
+                <a:solidFill>
+                  <a:schemeClr val="dk1"/>
+                </a:solidFill>
+                <a:latin typeface="Calibri"/>
+                <a:ea typeface="Calibri"/>
+                <a:cs typeface="Calibri"/>
+                <a:sym typeface="Calibri"/>
+              </a:rPr>
+              <a:t>₹{{current_market_price}}</a:t>
+            </a:r>
+            <a:endParaRPr i="0" sz="1400" u="none" cap="none" strike="noStrike">
               <a:solidFill>
                 <a:schemeClr val="dk1"/>
               </a:solidFill>
@@ -10621,7 +10754,7 @@
               <a:buNone/>
             </a:pPr>
             <a:r>
-              <a:rPr b="1" i="0" lang="en-GB" sz="1375" u="none" cap="none" strike="noStrike">
+              <a:rPr b="1" i="0" lang="en-GB" sz="1400" u="none" cap="none" strike="noStrike">
                 <a:solidFill>
                   <a:schemeClr val="dk1"/>
                 </a:solidFill>
@@ -10630,30 +10763,10 @@
                 <a:cs typeface="Calibri"/>
                 <a:sym typeface="Calibri"/>
               </a:rPr>
-              <a:t>Target Price: ₹{{target_price}}|Upside: {{upside_percentage}}%</a:t>
+              <a:t>Target Price: </a:t>
             </a:r>
-            <a:endParaRPr/>
-          </a:p>
-          <a:p>
-            <a:pPr indent="0" lvl="0" marL="0" marR="0" rtl="0" algn="ctr">
-              <a:lnSpc>
-                <a:spcPct val="95000"/>
-              </a:lnSpc>
-              <a:spcBef>
-                <a:spcPts val="0"/>
-              </a:spcBef>
-              <a:spcAft>
-                <a:spcPts val="0"/>
-              </a:spcAft>
-              <a:buClr>
-                <a:schemeClr val="dk2"/>
-              </a:buClr>
-              <a:buSzPts val="744"/>
-              <a:buFont typeface="Arial"/>
-              <a:buNone/>
-            </a:pPr>
             <a:r>
-              <a:rPr b="1" i="0" lang="en-GB" sz="1375" u="none" cap="none" strike="noStrike">
+              <a:rPr i="0" lang="en-GB" sz="1400" u="none" cap="none" strike="noStrike">
                 <a:solidFill>
                   <a:schemeClr val="dk1"/>
                 </a:solidFill>
@@ -10662,9 +10775,82 @@
                 <a:cs typeface="Calibri"/>
                 <a:sym typeface="Calibri"/>
               </a:rPr>
-              <a:t>Date: {{today_date}}</a:t>
+              <a:t>₹{{target_price}}</a:t>
             </a:r>
-            <a:endParaRPr b="1" i="0" sz="1375" u="none" cap="none" strike="noStrike">
+            <a:r>
+              <a:rPr b="1" i="0" lang="en-GB" sz="1400" u="none" cap="none" strike="noStrike">
+                <a:solidFill>
+                  <a:schemeClr val="dk1"/>
+                </a:solidFill>
+                <a:latin typeface="Calibri"/>
+                <a:ea typeface="Calibri"/>
+                <a:cs typeface="Calibri"/>
+                <a:sym typeface="Calibri"/>
+              </a:rPr>
+              <a:t>|Upside: </a:t>
+            </a:r>
+            <a:r>
+              <a:rPr i="0" lang="en-GB" sz="1400" u="none" cap="none" strike="noStrike">
+                <a:solidFill>
+                  <a:schemeClr val="dk1"/>
+                </a:solidFill>
+                <a:latin typeface="Calibri"/>
+                <a:ea typeface="Calibri"/>
+                <a:cs typeface="Calibri"/>
+                <a:sym typeface="Calibri"/>
+              </a:rPr>
+              <a:t>{{upside_percentage}}%</a:t>
+            </a:r>
+            <a:endParaRPr sz="1400">
+              <a:latin typeface="Calibri"/>
+              <a:ea typeface="Calibri"/>
+              <a:cs typeface="Calibri"/>
+              <a:sym typeface="Calibri"/>
+            </a:endParaRPr>
+          </a:p>
+          <a:p>
+            <a:pPr indent="0" lvl="0" marL="0" marR="0" rtl="0" algn="ctr">
+              <a:lnSpc>
+                <a:spcPct val="95000"/>
+              </a:lnSpc>
+              <a:spcBef>
+                <a:spcPts val="0"/>
+              </a:spcBef>
+              <a:spcAft>
+                <a:spcPts val="0"/>
+              </a:spcAft>
+              <a:buClr>
+                <a:schemeClr val="dk2"/>
+              </a:buClr>
+              <a:buSzPts val="744"/>
+              <a:buFont typeface="Arial"/>
+              <a:buNone/>
+            </a:pPr>
+            <a:r>
+              <a:rPr b="1" i="0" lang="en-GB" sz="1400" u="none" cap="none" strike="noStrike">
+                <a:solidFill>
+                  <a:schemeClr val="dk1"/>
+                </a:solidFill>
+                <a:latin typeface="Calibri"/>
+                <a:ea typeface="Calibri"/>
+                <a:cs typeface="Calibri"/>
+                <a:sym typeface="Calibri"/>
+              </a:rPr>
+              <a:t>Date: </a:t>
+            </a:r>
+            <a:r>
+              <a:rPr i="0" lang="en-GB" sz="1400" u="none" cap="none" strike="noStrike">
+                <a:solidFill>
+                  <a:schemeClr val="dk1"/>
+                </a:solidFill>
+                <a:latin typeface="Calibri"/>
+                <a:ea typeface="Calibri"/>
+                <a:cs typeface="Calibri"/>
+                <a:sym typeface="Calibri"/>
+              </a:rPr>
+              <a:t>{{today_date}}</a:t>
+            </a:r>
+            <a:endParaRPr i="0" sz="1400" u="none" cap="none" strike="noStrike">
               <a:solidFill>
                 <a:schemeClr val="dk1"/>
               </a:solidFill>
@@ -10745,7 +10931,7 @@
             </a:pPr>
             <a:r>
               <a:rPr lang="en-GB"/>
-              <a:t>{{Industry_Risks_h}}</a:t>
+              <a:t>Industry Risks</a:t>
             </a:r>
             <a:endParaRPr/>
           </a:p>
@@ -10759,8 +10945,8 @@
         </p:nvSpPr>
         <p:spPr>
           <a:xfrm>
-            <a:off x="171450" y="723900"/>
-            <a:ext cx="8705850" cy="523220"/>
+            <a:off x="219150" y="623600"/>
+            <a:ext cx="8705700" cy="276900"/>
           </a:xfrm>
           <a:prstGeom prst="rect">
             <a:avLst/>
@@ -10789,7 +10975,7 @@
               <a:buNone/>
             </a:pPr>
             <a:r>
-              <a:rPr b="0" i="0" lang="en-GB" sz="1400" u="none" cap="none" strike="noStrike">
+              <a:rPr i="0" lang="en-GB" sz="1200" u="none" cap="none" strike="noStrike">
                 <a:solidFill>
                   <a:schemeClr val="dk1"/>
                 </a:solidFill>
@@ -10800,40 +10986,14 @@
               </a:rPr>
               <a:t>{{industry_risk}}</a:t>
             </a:r>
-            <a:endParaRPr b="0" i="0" sz="1400" u="none" cap="none" strike="noStrike">
+            <a:endParaRPr i="0" sz="1200" u="none" cap="none" strike="noStrike">
               <a:solidFill>
                 <a:srgbClr val="000000"/>
               </a:solidFill>
-              <a:latin typeface="Arial"/>
-              <a:ea typeface="Arial"/>
-              <a:cs typeface="Arial"/>
-              <a:sym typeface="Arial"/>
-            </a:endParaRPr>
-          </a:p>
-          <a:p>
-            <a:pPr indent="0" lvl="0" marL="0" marR="0" rtl="0" algn="l">
-              <a:lnSpc>
-                <a:spcPct val="100000"/>
-              </a:lnSpc>
-              <a:spcBef>
-                <a:spcPts val="0"/>
-              </a:spcBef>
-              <a:spcAft>
-                <a:spcPts val="0"/>
-              </a:spcAft>
-              <a:buNone/>
-            </a:pPr>
-            <a:r>
-              <a:t/>
-            </a:r>
-            <a:endParaRPr b="0" i="0" sz="1400" u="none" cap="none" strike="noStrike">
-              <a:solidFill>
-                <a:srgbClr val="000000"/>
-              </a:solidFill>
-              <a:latin typeface="Arial"/>
-              <a:ea typeface="Arial"/>
-              <a:cs typeface="Arial"/>
-              <a:sym typeface="Arial"/>
+              <a:latin typeface="Calibri"/>
+              <a:ea typeface="Calibri"/>
+              <a:cs typeface="Calibri"/>
+              <a:sym typeface="Calibri"/>
             </a:endParaRPr>
           </a:p>
         </p:txBody>
@@ -10907,7 +11067,7 @@
             </a:pPr>
             <a:r>
               <a:rPr lang="en-GB"/>
-              <a:t>{{Framework}}</a:t>
+              <a:t>SAARTHI Framework</a:t>
             </a:r>
             <a:endParaRPr/>
           </a:p>
@@ -10921,8 +11081,8 @@
         </p:nvSpPr>
         <p:spPr>
           <a:xfrm>
-            <a:off x="171450" y="723900"/>
-            <a:ext cx="8705700" cy="523200"/>
+            <a:off x="219150" y="637950"/>
+            <a:ext cx="8705700" cy="276900"/>
           </a:xfrm>
           <a:prstGeom prst="rect">
             <a:avLst/>
@@ -10951,7 +11111,7 @@
               <a:buNone/>
             </a:pPr>
             <a:r>
-              <a:rPr b="0" i="0" lang="en-GB" sz="1400" u="none" cap="none" strike="noStrike">
+              <a:rPr i="0" lang="en-GB" sz="1200" u="none" cap="none" strike="noStrike">
                 <a:solidFill>
                   <a:schemeClr val="dk1"/>
                 </a:solidFill>
@@ -10963,7 +11123,7 @@
               <a:t>{{</a:t>
             </a:r>
             <a:r>
-              <a:rPr lang="en-GB">
+              <a:rPr lang="en-GB" sz="1200">
                 <a:solidFill>
                   <a:schemeClr val="dk1"/>
                 </a:solidFill>
@@ -10975,7 +11135,7 @@
               <a:t>cs_saarthi_framework</a:t>
             </a:r>
             <a:r>
-              <a:rPr b="0" i="0" lang="en-GB" sz="1400" u="none" cap="none" strike="noStrike">
+              <a:rPr i="0" lang="en-GB" sz="1200" u="none" cap="none" strike="noStrike">
                 <a:solidFill>
                   <a:schemeClr val="dk1"/>
                 </a:solidFill>
@@ -10986,40 +11146,14 @@
               </a:rPr>
               <a:t>}}</a:t>
             </a:r>
-            <a:endParaRPr b="0" i="0" sz="1400" u="none" cap="none" strike="noStrike">
+            <a:endParaRPr i="0" sz="1200" u="none" cap="none" strike="noStrike">
               <a:solidFill>
                 <a:srgbClr val="000000"/>
               </a:solidFill>
-              <a:latin typeface="Arial"/>
-              <a:ea typeface="Arial"/>
-              <a:cs typeface="Arial"/>
-              <a:sym typeface="Arial"/>
-            </a:endParaRPr>
-          </a:p>
-          <a:p>
-            <a:pPr indent="0" lvl="0" marL="0" marR="0" rtl="0" algn="l">
-              <a:lnSpc>
-                <a:spcPct val="100000"/>
-              </a:lnSpc>
-              <a:spcBef>
-                <a:spcPts val="0"/>
-              </a:spcBef>
-              <a:spcAft>
-                <a:spcPts val="0"/>
-              </a:spcAft>
-              <a:buNone/>
-            </a:pPr>
-            <a:r>
-              <a:t/>
-            </a:r>
-            <a:endParaRPr b="0" i="0" sz="1400" u="none" cap="none" strike="noStrike">
-              <a:solidFill>
-                <a:srgbClr val="000000"/>
-              </a:solidFill>
-              <a:latin typeface="Arial"/>
-              <a:ea typeface="Arial"/>
-              <a:cs typeface="Arial"/>
-              <a:sym typeface="Arial"/>
+              <a:latin typeface="Calibri"/>
+              <a:ea typeface="Calibri"/>
+              <a:cs typeface="Calibri"/>
+              <a:sym typeface="Calibri"/>
             </a:endParaRPr>
           </a:p>
         </p:txBody>
@@ -11093,7 +11227,7 @@
             </a:pPr>
             <a:r>
               <a:rPr lang="en-GB"/>
-              <a:t>{{Entry_Review_Exit_h}}</a:t>
+              <a:t>Entry, Review &amp; Exit Strategy</a:t>
             </a:r>
             <a:endParaRPr/>
           </a:p>
@@ -11107,8 +11241,8 @@
         </p:nvSpPr>
         <p:spPr>
           <a:xfrm>
-            <a:off x="171450" y="723900"/>
-            <a:ext cx="8705850" cy="523220"/>
+            <a:off x="219150" y="652250"/>
+            <a:ext cx="8705700" cy="276900"/>
           </a:xfrm>
           <a:prstGeom prst="rect">
             <a:avLst/>
@@ -11137,7 +11271,7 @@
               <a:buNone/>
             </a:pPr>
             <a:r>
-              <a:rPr b="0" i="0" lang="en-GB" sz="1400" u="none" cap="none" strike="noStrike">
+              <a:rPr i="0" lang="en-GB" sz="1200" u="none" cap="none" strike="noStrike">
                 <a:solidFill>
                   <a:schemeClr val="dk1"/>
                 </a:solidFill>
@@ -11149,7 +11283,7 @@
               <a:t>{{</a:t>
             </a:r>
             <a:r>
-              <a:rPr lang="en-GB">
+              <a:rPr lang="en-GB" sz="1200">
                 <a:solidFill>
                   <a:schemeClr val="dk1"/>
                 </a:solidFill>
@@ -11161,7 +11295,7 @@
               <a:t>cs_entry_review_exit_strategy</a:t>
             </a:r>
             <a:r>
-              <a:rPr b="0" i="0" lang="en-GB" sz="1400" u="none" cap="none" strike="noStrike">
+              <a:rPr i="0" lang="en-GB" sz="1200" u="none" cap="none" strike="noStrike">
                 <a:solidFill>
                   <a:schemeClr val="dk1"/>
                 </a:solidFill>
@@ -11172,40 +11306,14 @@
               </a:rPr>
               <a:t>}}</a:t>
             </a:r>
-            <a:endParaRPr b="0" i="0" sz="1400" u="none" cap="none" strike="noStrike">
+            <a:endParaRPr i="0" sz="1200" u="none" cap="none" strike="noStrike">
               <a:solidFill>
                 <a:srgbClr val="000000"/>
               </a:solidFill>
-              <a:latin typeface="Arial"/>
-              <a:ea typeface="Arial"/>
-              <a:cs typeface="Arial"/>
-              <a:sym typeface="Arial"/>
-            </a:endParaRPr>
-          </a:p>
-          <a:p>
-            <a:pPr indent="0" lvl="0" marL="0" marR="0" rtl="0" algn="l">
-              <a:lnSpc>
-                <a:spcPct val="100000"/>
-              </a:lnSpc>
-              <a:spcBef>
-                <a:spcPts val="0"/>
-              </a:spcBef>
-              <a:spcAft>
-                <a:spcPts val="0"/>
-              </a:spcAft>
-              <a:buNone/>
-            </a:pPr>
-            <a:r>
-              <a:t/>
-            </a:r>
-            <a:endParaRPr b="0" i="0" sz="1400" u="none" cap="none" strike="noStrike">
-              <a:solidFill>
-                <a:srgbClr val="000000"/>
-              </a:solidFill>
-              <a:latin typeface="Arial"/>
-              <a:ea typeface="Arial"/>
-              <a:cs typeface="Arial"/>
-              <a:sym typeface="Arial"/>
+              <a:latin typeface="Calibri"/>
+              <a:ea typeface="Calibri"/>
+              <a:cs typeface="Calibri"/>
+              <a:sym typeface="Calibri"/>
             </a:endParaRPr>
           </a:p>
         </p:txBody>
@@ -11279,7 +11387,7 @@
             </a:pPr>
             <a:r>
               <a:rPr lang="en-GB"/>
-              <a:t>{{Scenario_Analysis_h}}</a:t>
+              <a:t>Scenario Analysis</a:t>
             </a:r>
             <a:endParaRPr/>
           </a:p>
@@ -11293,8 +11401,8 @@
         </p:nvSpPr>
         <p:spPr>
           <a:xfrm>
-            <a:off x="171450" y="723900"/>
-            <a:ext cx="8705850" cy="523220"/>
+            <a:off x="219150" y="623600"/>
+            <a:ext cx="8705700" cy="276900"/>
           </a:xfrm>
           <a:prstGeom prst="rect">
             <a:avLst/>
@@ -11323,7 +11431,7 @@
               <a:buNone/>
             </a:pPr>
             <a:r>
-              <a:rPr b="0" i="0" lang="en-GB" sz="1400" u="none" cap="none" strike="noStrike">
+              <a:rPr i="0" lang="en-GB" sz="1200" u="none" cap="none" strike="noStrike">
                 <a:solidFill>
                   <a:schemeClr val="dk1"/>
                 </a:solidFill>
@@ -11335,7 +11443,7 @@
               <a:t>{{</a:t>
             </a:r>
             <a:r>
-              <a:rPr lang="en-GB">
+              <a:rPr lang="en-GB" sz="1200">
                 <a:solidFill>
                   <a:schemeClr val="dk1"/>
                 </a:solidFill>
@@ -11347,7 +11455,7 @@
               <a:t>cs_scenario_analysis</a:t>
             </a:r>
             <a:r>
-              <a:rPr b="0" i="0" lang="en-GB" sz="1400" u="none" cap="none" strike="noStrike">
+              <a:rPr i="0" lang="en-GB" sz="1200" u="none" cap="none" strike="noStrike">
                 <a:solidFill>
                   <a:schemeClr val="dk1"/>
                 </a:solidFill>
@@ -11358,40 +11466,14 @@
               </a:rPr>
               <a:t>}}</a:t>
             </a:r>
-            <a:endParaRPr b="0" i="0" sz="1400" u="none" cap="none" strike="noStrike">
+            <a:endParaRPr i="0" sz="1200" u="none" cap="none" strike="noStrike">
               <a:solidFill>
                 <a:srgbClr val="000000"/>
               </a:solidFill>
-              <a:latin typeface="Arial"/>
-              <a:ea typeface="Arial"/>
-              <a:cs typeface="Arial"/>
-              <a:sym typeface="Arial"/>
-            </a:endParaRPr>
-          </a:p>
-          <a:p>
-            <a:pPr indent="0" lvl="0" marL="0" marR="0" rtl="0" algn="l">
-              <a:lnSpc>
-                <a:spcPct val="100000"/>
-              </a:lnSpc>
-              <a:spcBef>
-                <a:spcPts val="0"/>
-              </a:spcBef>
-              <a:spcAft>
-                <a:spcPts val="0"/>
-              </a:spcAft>
-              <a:buNone/>
-            </a:pPr>
-            <a:r>
-              <a:t/>
-            </a:r>
-            <a:endParaRPr b="0" i="0" sz="1400" u="none" cap="none" strike="noStrike">
-              <a:solidFill>
-                <a:srgbClr val="000000"/>
-              </a:solidFill>
-              <a:latin typeface="Arial"/>
-              <a:ea typeface="Arial"/>
-              <a:cs typeface="Arial"/>
-              <a:sym typeface="Arial"/>
+              <a:latin typeface="Calibri"/>
+              <a:ea typeface="Calibri"/>
+              <a:cs typeface="Calibri"/>
+              <a:sym typeface="Calibri"/>
             </a:endParaRPr>
           </a:p>
         </p:txBody>
@@ -11693,7 +11775,7 @@
         <p:spPr>
           <a:xfrm>
             <a:off x="594782" y="659486"/>
-            <a:ext cx="2415118" cy="307736"/>
+            <a:ext cx="2415000" cy="276900"/>
           </a:xfrm>
           <a:prstGeom prst="rect">
             <a:avLst/>
@@ -11727,25 +11809,25 @@
               <a:buNone/>
             </a:pPr>
             <a:r>
-              <a:rPr b="0" i="0" lang="en-GB" sz="1400" u="none" cap="none" strike="noStrike">
+              <a:rPr i="0" lang="en-GB" sz="1200" u="none" cap="none" strike="noStrike">
                 <a:solidFill>
                   <a:srgbClr val="000000"/>
                 </a:solidFill>
-                <a:latin typeface="Arial"/>
-                <a:ea typeface="Arial"/>
-                <a:cs typeface="Arial"/>
-                <a:sym typeface="Arial"/>
+                <a:latin typeface="Calibri"/>
+                <a:ea typeface="Calibri"/>
+                <a:cs typeface="Calibri"/>
+                <a:sym typeface="Calibri"/>
               </a:rPr>
               <a:t>{{summary_table}}</a:t>
             </a:r>
-            <a:endParaRPr b="0" i="0" sz="1400" u="none" cap="none" strike="noStrike">
+            <a:endParaRPr i="0" sz="1200" u="none" cap="none" strike="noStrike">
               <a:solidFill>
                 <a:srgbClr val="000000"/>
               </a:solidFill>
-              <a:latin typeface="Arial"/>
-              <a:ea typeface="Arial"/>
-              <a:cs typeface="Arial"/>
-              <a:sym typeface="Arial"/>
+              <a:latin typeface="Calibri"/>
+              <a:ea typeface="Calibri"/>
+              <a:cs typeface="Calibri"/>
+              <a:sym typeface="Calibri"/>
             </a:endParaRPr>
           </a:p>
         </p:txBody>
@@ -11819,7 +11901,7 @@
             </a:pPr>
             <a:r>
               <a:rPr lang="en-GB"/>
-              <a:t>Story in charts!</a:t>
+              <a:t>Story in Charts</a:t>
             </a:r>
             <a:endParaRPr/>
           </a:p>
@@ -11834,7 +11916,7 @@
         <p:spPr>
           <a:xfrm>
             <a:off x="2562578" y="1636889"/>
-            <a:ext cx="1495922" cy="307777"/>
+            <a:ext cx="1495800" cy="276900"/>
           </a:xfrm>
           <a:prstGeom prst="rect">
             <a:avLst/>
@@ -11868,25 +11950,25 @@
               <a:buNone/>
             </a:pPr>
             <a:r>
-              <a:rPr b="0" i="0" lang="en-GB" sz="1400" u="none" cap="none" strike="noStrike">
+              <a:rPr i="0" lang="en-GB" sz="1200" u="none" cap="none" strike="noStrike">
                 <a:solidFill>
                   <a:srgbClr val="000000"/>
                 </a:solidFill>
-                <a:latin typeface="Arial"/>
-                <a:ea typeface="Arial"/>
-                <a:cs typeface="Arial"/>
-                <a:sym typeface="Arial"/>
+                <a:latin typeface="Calibri"/>
+                <a:ea typeface="Calibri"/>
+                <a:cs typeface="Calibri"/>
+                <a:sym typeface="Calibri"/>
               </a:rPr>
               <a:t>{{chart_custom}}</a:t>
             </a:r>
-            <a:endParaRPr b="0" i="0" sz="1400" u="none" cap="none" strike="noStrike">
+            <a:endParaRPr i="0" sz="1200" u="none" cap="none" strike="noStrike">
               <a:solidFill>
                 <a:srgbClr val="000000"/>
               </a:solidFill>
-              <a:latin typeface="Arial"/>
-              <a:ea typeface="Arial"/>
-              <a:cs typeface="Arial"/>
-              <a:sym typeface="Arial"/>
+              <a:latin typeface="Calibri"/>
+              <a:ea typeface="Calibri"/>
+              <a:cs typeface="Calibri"/>
+              <a:sym typeface="Calibri"/>
             </a:endParaRPr>
           </a:p>
         </p:txBody>
@@ -11974,8 +12056,8 @@
         </p:nvSpPr>
         <p:spPr>
           <a:xfrm>
-            <a:off x="70050" y="635494"/>
-            <a:ext cx="9003900" cy="4224300"/>
+            <a:off x="0" y="543600"/>
+            <a:ext cx="9144000" cy="4224300"/>
           </a:xfrm>
           <a:prstGeom prst="rect">
             <a:avLst/>
@@ -12699,7 +12781,7 @@
           <p:nvPr/>
         </p:nvPicPr>
         <p:blipFill rotWithShape="1">
-          <a:blip r:embed="rId4">
+          <a:blip r:embed="rId3">
             <a:alphaModFix/>
           </a:blip>
           <a:srcRect b="0" l="0" r="0" t="0"/>
@@ -12788,7 +12870,7 @@
             </a:pPr>
             <a:r>
               <a:rPr lang="en-GB"/>
-              <a:t>{{Masterheading_h}}</a:t>
+              <a:t>Company Insider</a:t>
             </a:r>
             <a:endParaRPr/>
           </a:p>
@@ -12803,7 +12885,7 @@
         <p:spPr>
           <a:xfrm>
             <a:off x="6001103" y="3409245"/>
-            <a:ext cx="1885244" cy="307777"/>
+            <a:ext cx="1885200" cy="276900"/>
           </a:xfrm>
           <a:prstGeom prst="rect">
             <a:avLst/>
@@ -12837,25 +12919,25 @@
               <a:buNone/>
             </a:pPr>
             <a:r>
-              <a:rPr b="0" i="0" lang="en-GB" sz="1400" u="none" cap="none" strike="noStrike">
+              <a:rPr i="0" lang="en-GB" sz="1200" u="none" cap="none" strike="noStrike">
                 <a:solidFill>
                   <a:srgbClr val="000000"/>
                 </a:solidFill>
-                <a:latin typeface="Arial"/>
-                <a:ea typeface="Arial"/>
-                <a:cs typeface="Arial"/>
-                <a:sym typeface="Arial"/>
+                <a:latin typeface="Calibri"/>
+                <a:ea typeface="Calibri"/>
+                <a:cs typeface="Calibri"/>
+                <a:sym typeface="Calibri"/>
               </a:rPr>
               <a:t>{{financial_table}}</a:t>
             </a:r>
-            <a:endParaRPr b="0" i="0" sz="1400" u="none" cap="none" strike="noStrike">
+            <a:endParaRPr i="0" sz="1200" u="none" cap="none" strike="noStrike">
               <a:solidFill>
                 <a:srgbClr val="000000"/>
               </a:solidFill>
-              <a:latin typeface="Arial"/>
-              <a:ea typeface="Arial"/>
-              <a:cs typeface="Arial"/>
-              <a:sym typeface="Arial"/>
+              <a:latin typeface="Calibri"/>
+              <a:ea typeface="Calibri"/>
+              <a:cs typeface="Calibri"/>
+              <a:sym typeface="Calibri"/>
             </a:endParaRPr>
           </a:p>
         </p:txBody>
@@ -12868,8 +12950,8 @@
         </p:nvSpPr>
         <p:spPr>
           <a:xfrm>
-            <a:off x="6169378" y="1224845"/>
-            <a:ext cx="1885244" cy="307777"/>
+            <a:off x="6083403" y="1193220"/>
+            <a:ext cx="1885200" cy="276900"/>
           </a:xfrm>
           <a:prstGeom prst="rect">
             <a:avLst/>
@@ -12903,25 +12985,25 @@
               <a:buNone/>
             </a:pPr>
             <a:r>
-              <a:rPr b="0" i="0" lang="en-GB" sz="1400" u="none" cap="none" strike="noStrike">
+              <a:rPr i="0" lang="en-GB" sz="1200" u="none" cap="none" strike="noStrike">
                 <a:solidFill>
                   <a:srgbClr val="000000"/>
                 </a:solidFill>
-                <a:latin typeface="Arial"/>
-                <a:ea typeface="Arial"/>
-                <a:cs typeface="Arial"/>
-                <a:sym typeface="Arial"/>
+                <a:latin typeface="Calibri"/>
+                <a:ea typeface="Calibri"/>
+                <a:cs typeface="Calibri"/>
+                <a:sym typeface="Calibri"/>
               </a:rPr>
               <a:t>{{prize_chart}}</a:t>
             </a:r>
-            <a:endParaRPr b="0" i="0" sz="1400" u="none" cap="none" strike="noStrike">
+            <a:endParaRPr i="0" sz="1200" u="none" cap="none" strike="noStrike">
               <a:solidFill>
                 <a:srgbClr val="000000"/>
               </a:solidFill>
-              <a:latin typeface="Arial"/>
-              <a:ea typeface="Arial"/>
-              <a:cs typeface="Arial"/>
-              <a:sym typeface="Arial"/>
+              <a:latin typeface="Calibri"/>
+              <a:ea typeface="Calibri"/>
+              <a:cs typeface="Calibri"/>
+              <a:sym typeface="Calibri"/>
             </a:endParaRPr>
           </a:p>
         </p:txBody>
@@ -12934,8 +13016,8 @@
         </p:nvSpPr>
         <p:spPr>
           <a:xfrm>
-            <a:off x="1" y="670033"/>
-            <a:ext cx="4381500" cy="523200"/>
+            <a:off x="85981" y="627056"/>
+            <a:ext cx="4381500" cy="461700"/>
           </a:xfrm>
           <a:prstGeom prst="rect">
             <a:avLst/>
@@ -12964,10 +13046,20 @@
               <a:buNone/>
             </a:pPr>
             <a:r>
-              <a:rPr lang="en-GB"/>
+              <a:rPr lang="en-GB" sz="1200">
+                <a:latin typeface="Calibri"/>
+                <a:ea typeface="Calibri"/>
+                <a:cs typeface="Calibri"/>
+                <a:sym typeface="Calibri"/>
+              </a:rPr>
               <a:t>{{cs_investment_rationale}}</a:t>
             </a:r>
-            <a:endParaRPr/>
+            <a:endParaRPr sz="1200">
+              <a:latin typeface="Calibri"/>
+              <a:ea typeface="Calibri"/>
+              <a:cs typeface="Calibri"/>
+              <a:sym typeface="Calibri"/>
+            </a:endParaRPr>
           </a:p>
           <a:p>
             <a:pPr indent="0" lvl="0" marL="0" marR="0" rtl="0" algn="l">
@@ -12985,10 +13077,14 @@
             <a:r>
               <a:t/>
             </a:r>
-            <a:endParaRPr i="0" sz="1400" u="none" cap="none" strike="noStrike">
+            <a:endParaRPr i="0" sz="1200" u="none" cap="none" strike="noStrike">
               <a:solidFill>
                 <a:srgbClr val="000000"/>
               </a:solidFill>
+              <a:latin typeface="Calibri"/>
+              <a:ea typeface="Calibri"/>
+              <a:cs typeface="Calibri"/>
+              <a:sym typeface="Calibri"/>
             </a:endParaRPr>
           </a:p>
         </p:txBody>
@@ -13062,7 +13158,7 @@
             </a:pPr>
             <a:r>
               <a:rPr lang="en-GB"/>
-              <a:t>{{Company_Background_h}}</a:t>
+              <a:t>Company Background</a:t>
             </a:r>
             <a:endParaRPr/>
           </a:p>
@@ -13076,8 +13172,8 @@
         </p:nvSpPr>
         <p:spPr>
           <a:xfrm>
-            <a:off x="138289" y="783872"/>
-            <a:ext cx="8867422" cy="523220"/>
+            <a:off x="138289" y="626272"/>
+            <a:ext cx="8867400" cy="276900"/>
           </a:xfrm>
           <a:prstGeom prst="rect">
             <a:avLst/>
@@ -13106,7 +13202,7 @@
               <a:buNone/>
             </a:pPr>
             <a:r>
-              <a:rPr b="0" i="0" lang="en-GB" sz="1400" u="none" cap="none" strike="noStrike">
+              <a:rPr i="0" lang="en-GB" sz="1200" u="none" cap="none" strike="noStrike">
                 <a:solidFill>
                   <a:schemeClr val="dk1"/>
                 </a:solidFill>
@@ -13117,40 +13213,14 @@
               </a:rPr>
               <a:t> {{company_background}}</a:t>
             </a:r>
-            <a:endParaRPr b="0" i="0" sz="1400" u="none" cap="none" strike="noStrike">
+            <a:endParaRPr i="0" sz="1200" u="none" cap="none" strike="noStrike">
               <a:solidFill>
                 <a:srgbClr val="000000"/>
               </a:solidFill>
-              <a:latin typeface="Arial"/>
-              <a:ea typeface="Arial"/>
-              <a:cs typeface="Arial"/>
-              <a:sym typeface="Arial"/>
-            </a:endParaRPr>
-          </a:p>
-          <a:p>
-            <a:pPr indent="0" lvl="0" marL="0" marR="0" rtl="0" algn="l">
-              <a:lnSpc>
-                <a:spcPct val="100000"/>
-              </a:lnSpc>
-              <a:spcBef>
-                <a:spcPts val="0"/>
-              </a:spcBef>
-              <a:spcAft>
-                <a:spcPts val="0"/>
-              </a:spcAft>
-              <a:buNone/>
-            </a:pPr>
-            <a:r>
-              <a:t/>
-            </a:r>
-            <a:endParaRPr b="0" i="0" sz="1400" u="none" cap="none" strike="noStrike">
-              <a:solidFill>
-                <a:srgbClr val="000000"/>
-              </a:solidFill>
-              <a:latin typeface="Arial"/>
-              <a:ea typeface="Arial"/>
-              <a:cs typeface="Arial"/>
-              <a:sym typeface="Arial"/>
+              <a:latin typeface="Calibri"/>
+              <a:ea typeface="Calibri"/>
+              <a:cs typeface="Calibri"/>
+              <a:sym typeface="Calibri"/>
             </a:endParaRPr>
           </a:p>
         </p:txBody>
@@ -13224,7 +13294,7 @@
             </a:pPr>
             <a:r>
               <a:rPr lang="en-GB"/>
-              <a:t>{{Business_Model_Explanation_h}}</a:t>
+              <a:t>Business Model</a:t>
             </a:r>
             <a:endParaRPr/>
           </a:p>
@@ -13238,8 +13308,8 @@
         </p:nvSpPr>
         <p:spPr>
           <a:xfrm>
-            <a:off x="124178" y="688622"/>
-            <a:ext cx="8867422" cy="523220"/>
+            <a:off x="138303" y="631297"/>
+            <a:ext cx="8867400" cy="276900"/>
           </a:xfrm>
           <a:prstGeom prst="rect">
             <a:avLst/>
@@ -13268,7 +13338,7 @@
               <a:buNone/>
             </a:pPr>
             <a:r>
-              <a:rPr b="0" i="0" lang="en-GB" sz="1400" u="none" cap="none" strike="noStrike">
+              <a:rPr i="0" lang="en-GB" sz="1200" u="none" cap="none" strike="noStrike">
                 <a:solidFill>
                   <a:schemeClr val="dk1"/>
                 </a:solidFill>
@@ -13279,40 +13349,14 @@
               </a:rPr>
               <a:t>{{business_model}}</a:t>
             </a:r>
-            <a:endParaRPr b="0" i="0" sz="1400" u="none" cap="none" strike="noStrike">
+            <a:endParaRPr i="0" sz="1200" u="none" cap="none" strike="noStrike">
               <a:solidFill>
                 <a:srgbClr val="000000"/>
               </a:solidFill>
-              <a:latin typeface="Arial"/>
-              <a:ea typeface="Arial"/>
-              <a:cs typeface="Arial"/>
-              <a:sym typeface="Arial"/>
-            </a:endParaRPr>
-          </a:p>
-          <a:p>
-            <a:pPr indent="0" lvl="0" marL="0" marR="0" rtl="0" algn="l">
-              <a:lnSpc>
-                <a:spcPct val="100000"/>
-              </a:lnSpc>
-              <a:spcBef>
-                <a:spcPts val="0"/>
-              </a:spcBef>
-              <a:spcAft>
-                <a:spcPts val="0"/>
-              </a:spcAft>
-              <a:buNone/>
-            </a:pPr>
-            <a:r>
-              <a:t/>
-            </a:r>
-            <a:endParaRPr b="0" i="0" sz="1400" u="none" cap="none" strike="noStrike">
-              <a:solidFill>
-                <a:srgbClr val="000000"/>
-              </a:solidFill>
-              <a:latin typeface="Arial"/>
-              <a:ea typeface="Arial"/>
-              <a:cs typeface="Arial"/>
-              <a:sym typeface="Arial"/>
+              <a:latin typeface="Calibri"/>
+              <a:ea typeface="Calibri"/>
+              <a:cs typeface="Calibri"/>
+              <a:sym typeface="Calibri"/>
             </a:endParaRPr>
           </a:p>
         </p:txBody>
@@ -13386,7 +13430,7 @@
             </a:pPr>
             <a:r>
               <a:rPr lang="en-GB"/>
-              <a:t>{{Management_Analysis_h}}</a:t>
+              <a:t>Management Analysis</a:t>
             </a:r>
             <a:endParaRPr/>
           </a:p>
@@ -13400,8 +13444,8 @@
         </p:nvSpPr>
         <p:spPr>
           <a:xfrm>
-            <a:off x="138289" y="804574"/>
-            <a:ext cx="8867422" cy="523220"/>
+            <a:off x="138289" y="632649"/>
+            <a:ext cx="8867400" cy="276900"/>
           </a:xfrm>
           <a:prstGeom prst="rect">
             <a:avLst/>
@@ -13430,7 +13474,7 @@
               <a:buNone/>
             </a:pPr>
             <a:r>
-              <a:rPr b="0" i="0" lang="en-GB" sz="1400" u="none" cap="none" strike="noStrike">
+              <a:rPr i="0" lang="en-GB" sz="1200" u="none" cap="none" strike="noStrike">
                 <a:solidFill>
                   <a:schemeClr val="dk1"/>
                 </a:solidFill>
@@ -13441,40 +13485,14 @@
               </a:rPr>
               <a:t>{{management_analysis}}</a:t>
             </a:r>
-            <a:endParaRPr b="0" i="0" sz="1400" u="none" cap="none" strike="noStrike">
+            <a:endParaRPr i="0" sz="1200" u="none" cap="none" strike="noStrike">
               <a:solidFill>
                 <a:srgbClr val="000000"/>
               </a:solidFill>
-              <a:latin typeface="Arial"/>
-              <a:ea typeface="Arial"/>
-              <a:cs typeface="Arial"/>
-              <a:sym typeface="Arial"/>
-            </a:endParaRPr>
-          </a:p>
-          <a:p>
-            <a:pPr indent="0" lvl="0" marL="0" marR="0" rtl="0" algn="l">
-              <a:lnSpc>
-                <a:spcPct val="100000"/>
-              </a:lnSpc>
-              <a:spcBef>
-                <a:spcPts val="0"/>
-              </a:spcBef>
-              <a:spcAft>
-                <a:spcPts val="0"/>
-              </a:spcAft>
-              <a:buNone/>
-            </a:pPr>
-            <a:r>
-              <a:t/>
-            </a:r>
-            <a:endParaRPr b="0" i="0" sz="1400" u="none" cap="none" strike="noStrike">
-              <a:solidFill>
-                <a:srgbClr val="000000"/>
-              </a:solidFill>
-              <a:latin typeface="Arial"/>
-              <a:ea typeface="Arial"/>
-              <a:cs typeface="Arial"/>
-              <a:sym typeface="Arial"/>
+              <a:latin typeface="Calibri"/>
+              <a:ea typeface="Calibri"/>
+              <a:cs typeface="Calibri"/>
+              <a:sym typeface="Calibri"/>
             </a:endParaRPr>
           </a:p>
         </p:txBody>
@@ -13548,7 +13566,7 @@
             </a:pPr>
             <a:r>
               <a:rPr lang="en-GB"/>
-              <a:t>{{Coporate_Governance_h}}</a:t>
+              <a:t>Corporate Governance</a:t>
             </a:r>
             <a:endParaRPr/>
           </a:p>
@@ -13562,8 +13580,8 @@
         </p:nvSpPr>
         <p:spPr>
           <a:xfrm>
-            <a:off x="138289" y="804574"/>
-            <a:ext cx="8867422" cy="523220"/>
+            <a:off x="138289" y="646974"/>
+            <a:ext cx="8867400" cy="276900"/>
           </a:xfrm>
           <a:prstGeom prst="rect">
             <a:avLst/>
@@ -13592,7 +13610,7 @@
               <a:buNone/>
             </a:pPr>
             <a:r>
-              <a:rPr b="0" i="0" lang="en-GB" sz="1400" u="none" cap="none" strike="noStrike">
+              <a:rPr i="0" lang="en-GB" sz="1200" u="none" cap="none" strike="noStrike">
                 <a:solidFill>
                   <a:schemeClr val="dk1"/>
                 </a:solidFill>
@@ -13601,10 +13619,10 @@
                 <a:cs typeface="Calibri"/>
                 <a:sym typeface="Calibri"/>
               </a:rPr>
-              <a:t>{{cs</a:t>
+              <a:t>{{</a:t>
             </a:r>
             <a:r>
-              <a:rPr lang="en-GB">
+              <a:rPr lang="en-GB" sz="1200">
                 <a:solidFill>
                   <a:schemeClr val="dk1"/>
                 </a:solidFill>
@@ -13613,10 +13631,10 @@
                 <a:cs typeface="Calibri"/>
                 <a:sym typeface="Calibri"/>
               </a:rPr>
-              <a:t>_c</a:t>
+              <a:t>cs_corporate_governance</a:t>
             </a:r>
             <a:r>
-              <a:rPr b="0" i="0" lang="en-GB" sz="1400" u="none" cap="none" strike="noStrike">
+              <a:rPr i="0" lang="en-GB" sz="1200" u="none" cap="none" strike="noStrike">
                 <a:solidFill>
                   <a:schemeClr val="dk1"/>
                 </a:solidFill>
@@ -13625,66 +13643,16 @@
                 <a:cs typeface="Calibri"/>
                 <a:sym typeface="Calibri"/>
               </a:rPr>
-              <a:t>oporate_</a:t>
+              <a:t>}}</a:t>
             </a:r>
-            <a:r>
-              <a:rPr lang="en-GB">
-                <a:solidFill>
-                  <a:schemeClr val="dk1"/>
-                </a:solidFill>
-                <a:latin typeface="Calibri"/>
-                <a:ea typeface="Calibri"/>
-                <a:cs typeface="Calibri"/>
-                <a:sym typeface="Calibri"/>
-              </a:rPr>
-              <a:t>g</a:t>
-            </a:r>
-            <a:r>
-              <a:rPr b="0" i="0" lang="en-GB" sz="1400" u="none" cap="none" strike="noStrike">
-                <a:solidFill>
-                  <a:schemeClr val="dk1"/>
-                </a:solidFill>
-                <a:latin typeface="Calibri"/>
-                <a:ea typeface="Calibri"/>
-                <a:cs typeface="Calibri"/>
-                <a:sym typeface="Calibri"/>
-              </a:rPr>
-              <a:t>overnance}}</a:t>
-            </a:r>
-            <a:endParaRPr b="0" i="0" sz="1400" u="none" cap="none" strike="noStrike">
+            <a:endParaRPr i="0" sz="1200" u="none" cap="none" strike="noStrike">
               <a:solidFill>
                 <a:srgbClr val="000000"/>
               </a:solidFill>
-              <a:latin typeface="Arial"/>
-              <a:ea typeface="Arial"/>
-              <a:cs typeface="Arial"/>
-              <a:sym typeface="Arial"/>
-            </a:endParaRPr>
-          </a:p>
-          <a:p>
-            <a:pPr indent="0" lvl="0" marL="0" marR="0" rtl="0" algn="l">
-              <a:lnSpc>
-                <a:spcPct val="100000"/>
-              </a:lnSpc>
-              <a:spcBef>
-                <a:spcPts val="0"/>
-              </a:spcBef>
-              <a:spcAft>
-                <a:spcPts val="0"/>
-              </a:spcAft>
-              <a:buNone/>
-            </a:pPr>
-            <a:r>
-              <a:t/>
-            </a:r>
-            <a:endParaRPr b="0" i="0" sz="1400" u="none" cap="none" strike="noStrike">
-              <a:solidFill>
-                <a:srgbClr val="000000"/>
-              </a:solidFill>
-              <a:latin typeface="Arial"/>
-              <a:ea typeface="Arial"/>
-              <a:cs typeface="Arial"/>
-              <a:sym typeface="Arial"/>
+              <a:latin typeface="Calibri"/>
+              <a:ea typeface="Calibri"/>
+              <a:cs typeface="Calibri"/>
+              <a:sym typeface="Calibri"/>
             </a:endParaRPr>
           </a:p>
         </p:txBody>
@@ -13758,7 +13726,7 @@
             </a:pPr>
             <a:r>
               <a:rPr lang="en-GB"/>
-              <a:t>{{Industry_Overview_h}}</a:t>
+              <a:t>Industry Overview</a:t>
             </a:r>
             <a:endParaRPr/>
           </a:p>
@@ -13772,8 +13740,8 @@
         </p:nvSpPr>
         <p:spPr>
           <a:xfrm>
-            <a:off x="90854" y="703384"/>
-            <a:ext cx="8962292" cy="523220"/>
+            <a:off x="90904" y="646084"/>
+            <a:ext cx="8962200" cy="276900"/>
           </a:xfrm>
           <a:prstGeom prst="rect">
             <a:avLst/>
@@ -13802,7 +13770,7 @@
               <a:buNone/>
             </a:pPr>
             <a:r>
-              <a:rPr b="0" i="0" lang="en-GB" sz="1400" u="none" cap="none" strike="noStrike">
+              <a:rPr i="0" lang="en-GB" sz="1200" u="none" cap="none" strike="noStrike">
                 <a:solidFill>
                   <a:schemeClr val="dk1"/>
                 </a:solidFill>
@@ -13813,40 +13781,14 @@
               </a:rPr>
               <a:t>{{industry_overview}}</a:t>
             </a:r>
-            <a:endParaRPr b="0" i="0" sz="1400" u="none" cap="none" strike="noStrike">
+            <a:endParaRPr i="0" sz="1200" u="none" cap="none" strike="noStrike">
               <a:solidFill>
                 <a:srgbClr val="000000"/>
               </a:solidFill>
-              <a:latin typeface="Arial"/>
-              <a:ea typeface="Arial"/>
-              <a:cs typeface="Arial"/>
-              <a:sym typeface="Arial"/>
-            </a:endParaRPr>
-          </a:p>
-          <a:p>
-            <a:pPr indent="0" lvl="0" marL="0" marR="0" rtl="0" algn="l">
-              <a:lnSpc>
-                <a:spcPct val="100000"/>
-              </a:lnSpc>
-              <a:spcBef>
-                <a:spcPts val="0"/>
-              </a:spcBef>
-              <a:spcAft>
-                <a:spcPts val="0"/>
-              </a:spcAft>
-              <a:buNone/>
-            </a:pPr>
-            <a:r>
-              <a:t/>
-            </a:r>
-            <a:endParaRPr b="0" i="0" sz="1400" u="none" cap="none" strike="noStrike">
-              <a:solidFill>
-                <a:srgbClr val="000000"/>
-              </a:solidFill>
-              <a:latin typeface="Arial"/>
-              <a:ea typeface="Arial"/>
-              <a:cs typeface="Arial"/>
-              <a:sym typeface="Arial"/>
+              <a:latin typeface="Calibri"/>
+              <a:ea typeface="Calibri"/>
+              <a:cs typeface="Calibri"/>
+              <a:sym typeface="Calibri"/>
             </a:endParaRPr>
           </a:p>
         </p:txBody>
@@ -13920,7 +13862,7 @@
             </a:pPr>
             <a:r>
               <a:rPr lang="en-GB"/>
-              <a:t>{{Key_Industry_Tailwinds_h}}</a:t>
+              <a:t>Key Industry Tailwinds</a:t>
             </a:r>
             <a:endParaRPr/>
           </a:p>
@@ -13934,8 +13876,8 @@
         </p:nvSpPr>
         <p:spPr>
           <a:xfrm>
-            <a:off x="138289" y="783872"/>
-            <a:ext cx="8867422" cy="523220"/>
+            <a:off x="138289" y="654947"/>
+            <a:ext cx="8867400" cy="276900"/>
           </a:xfrm>
           <a:prstGeom prst="rect">
             <a:avLst/>
@@ -13964,51 +13906,25 @@
               <a:buNone/>
             </a:pPr>
             <a:r>
-              <a:rPr b="0" i="0" lang="en-GB" sz="1400" u="none" cap="none" strike="noStrike">
+              <a:rPr i="0" lang="en-GB" sz="1200" u="none" cap="none" strike="noStrike">
                 <a:solidFill>
                   <a:srgbClr val="000000"/>
                 </a:solidFill>
-                <a:latin typeface="Arial"/>
-                <a:ea typeface="Arial"/>
-                <a:cs typeface="Arial"/>
-                <a:sym typeface="Arial"/>
+                <a:latin typeface="Calibri"/>
+                <a:ea typeface="Calibri"/>
+                <a:cs typeface="Calibri"/>
+                <a:sym typeface="Calibri"/>
               </a:rPr>
               <a:t>{{industry_tailwinds}}</a:t>
             </a:r>
-            <a:endParaRPr b="0" i="0" sz="1400" u="none" cap="none" strike="noStrike">
+            <a:endParaRPr i="0" sz="1200" u="none" cap="none" strike="noStrike">
               <a:solidFill>
                 <a:srgbClr val="000000"/>
               </a:solidFill>
-              <a:latin typeface="Arial"/>
-              <a:ea typeface="Arial"/>
-              <a:cs typeface="Arial"/>
-              <a:sym typeface="Arial"/>
-            </a:endParaRPr>
-          </a:p>
-          <a:p>
-            <a:pPr indent="0" lvl="0" marL="0" marR="0" rtl="0" algn="l">
-              <a:lnSpc>
-                <a:spcPct val="100000"/>
-              </a:lnSpc>
-              <a:spcBef>
-                <a:spcPts val="0"/>
-              </a:spcBef>
-              <a:spcAft>
-                <a:spcPts val="0"/>
-              </a:spcAft>
-              <a:buNone/>
-            </a:pPr>
-            <a:r>
-              <a:t/>
-            </a:r>
-            <a:endParaRPr b="0" i="0" sz="1400" u="none" cap="none" strike="noStrike">
-              <a:solidFill>
-                <a:srgbClr val="000000"/>
-              </a:solidFill>
-              <a:latin typeface="Arial"/>
-              <a:ea typeface="Arial"/>
-              <a:cs typeface="Arial"/>
-              <a:sym typeface="Arial"/>
+              <a:latin typeface="Calibri"/>
+              <a:ea typeface="Calibri"/>
+              <a:cs typeface="Calibri"/>
+              <a:sym typeface="Calibri"/>
             </a:endParaRPr>
           </a:p>
         </p:txBody>
@@ -14082,7 +13998,7 @@
             </a:pPr>
             <a:r>
               <a:rPr lang="en-GB"/>
-              <a:t>{{Demand_drivers_h}}</a:t>
+              <a:t>Demand Drivers</a:t>
             </a:r>
             <a:endParaRPr/>
           </a:p>
@@ -14096,8 +14012,8 @@
         </p:nvSpPr>
         <p:spPr>
           <a:xfrm>
-            <a:off x="133350" y="789900"/>
-            <a:ext cx="8820150" cy="523220"/>
+            <a:off x="161850" y="646625"/>
+            <a:ext cx="8820300" cy="276900"/>
           </a:xfrm>
           <a:prstGeom prst="rect">
             <a:avLst/>
@@ -14126,7 +14042,7 @@
               <a:buNone/>
             </a:pPr>
             <a:r>
-              <a:rPr b="0" i="0" lang="en-GB" sz="1400" u="none" cap="none" strike="noStrike">
+              <a:rPr i="0" lang="en-GB" sz="1200" u="none" cap="none" strike="noStrike">
                 <a:solidFill>
                   <a:schemeClr val="dk1"/>
                 </a:solidFill>
@@ -14137,40 +14053,14 @@
               </a:rPr>
               <a:t>{{demand_drivers}}</a:t>
             </a:r>
-            <a:endParaRPr b="0" i="0" sz="1400" u="none" cap="none" strike="noStrike">
+            <a:endParaRPr i="0" sz="1200" u="none" cap="none" strike="noStrike">
               <a:solidFill>
                 <a:srgbClr val="000000"/>
               </a:solidFill>
-              <a:latin typeface="Arial"/>
-              <a:ea typeface="Arial"/>
-              <a:cs typeface="Arial"/>
-              <a:sym typeface="Arial"/>
-            </a:endParaRPr>
-          </a:p>
-          <a:p>
-            <a:pPr indent="0" lvl="0" marL="0" marR="0" rtl="0" algn="l">
-              <a:lnSpc>
-                <a:spcPct val="100000"/>
-              </a:lnSpc>
-              <a:spcBef>
-                <a:spcPts val="0"/>
-              </a:spcBef>
-              <a:spcAft>
-                <a:spcPts val="0"/>
-              </a:spcAft>
-              <a:buNone/>
-            </a:pPr>
-            <a:r>
-              <a:t/>
-            </a:r>
-            <a:endParaRPr b="0" i="0" sz="1400" u="none" cap="none" strike="noStrike">
-              <a:solidFill>
-                <a:srgbClr val="000000"/>
-              </a:solidFill>
-              <a:latin typeface="Arial"/>
-              <a:ea typeface="Arial"/>
-              <a:cs typeface="Arial"/>
-              <a:sym typeface="Arial"/>
+              <a:latin typeface="Calibri"/>
+              <a:ea typeface="Calibri"/>
+              <a:cs typeface="Calibri"/>
+              <a:sym typeface="Calibri"/>
             </a:endParaRPr>
           </a:p>
         </p:txBody>
@@ -14184,6 +14074,285 @@
 </file>
 
 <file path=ppt/theme/theme1.xml><?xml version="1.0" encoding="utf-8"?>
+<a:theme xmlns:a="http://schemas.openxmlformats.org/drawingml/2006/main" xmlns:r="http://schemas.openxmlformats.org/officeDocument/2006/relationships">
+  <a:themeElements>
+    <a:clrScheme name="Default">
+      <a:dk1>
+        <a:srgbClr val="000000"/>
+      </a:dk1>
+      <a:lt1>
+        <a:srgbClr val="FFFFFF"/>
+      </a:lt1>
+      <a:dk2>
+        <a:srgbClr val="158158"/>
+      </a:dk2>
+      <a:lt2>
+        <a:srgbClr val="F3F3F3"/>
+      </a:lt2>
+      <a:accent1>
+        <a:srgbClr val="058DC7"/>
+      </a:accent1>
+      <a:accent2>
+        <a:srgbClr val="50B432"/>
+      </a:accent2>
+      <a:accent3>
+        <a:srgbClr val="ED561B"/>
+      </a:accent3>
+      <a:accent4>
+        <a:srgbClr val="EDEF00"/>
+      </a:accent4>
+      <a:accent5>
+        <a:srgbClr val="24CBE5"/>
+      </a:accent5>
+      <a:accent6>
+        <a:srgbClr val="64E572"/>
+      </a:accent6>
+      <a:hlink>
+        <a:srgbClr val="2200CC"/>
+      </a:hlink>
+      <a:folHlink>
+        <a:srgbClr val="551A8B"/>
+      </a:folHlink>
+    </a:clrScheme>
+    <a:fontScheme name="Office">
+      <a:majorFont>
+        <a:latin typeface="Arial"/>
+        <a:ea typeface=""/>
+        <a:cs typeface=""/>
+        <a:font script="Jpan" typeface="ＭＳ Ｐゴシック"/>
+        <a:font script="Hang" typeface="맑은 고딕"/>
+        <a:font script="Hans" typeface="宋体"/>
+        <a:font script="Hant" typeface="新細明體"/>
+        <a:font script="Arab" typeface="Times New Roman"/>
+        <a:font script="Hebr" typeface="Times New Roman"/>
+        <a:font script="Thai" typeface="Angsana New"/>
+        <a:font script="Ethi" typeface="Nyala"/>
+        <a:font script="Beng" typeface="Vrinda"/>
+        <a:font script="Gujr" typeface="Shruti"/>
+        <a:font script="Khmr" typeface="MoolBoran"/>
+        <a:font script="Knda" typeface="Tunga"/>
+        <a:font script="Guru" typeface="Raavi"/>
+        <a:font script="Cans" typeface="Euphemia"/>
+        <a:font script="Cher" typeface="Plantagenet Cherokee"/>
+        <a:font script="Yiii" typeface="Microsoft Yi Baiti"/>
+        <a:font script="Tibt" typeface="Microsoft Himalaya"/>
+        <a:font script="Thaa" typeface="MV Boli"/>
+        <a:font script="Deva" typeface="Mangal"/>
+        <a:font script="Telu" typeface="Gautami"/>
+        <a:font script="Taml" typeface="Latha"/>
+        <a:font script="Syrc" typeface="Estrangelo Edessa"/>
+        <a:font script="Orya" typeface="Kalinga"/>
+        <a:font script="Mlym" typeface="Kartika"/>
+        <a:font script="Laoo" typeface="DokChampa"/>
+        <a:font script="Sinh" typeface="Iskoola Pota"/>
+        <a:font script="Mong" typeface="Mongolian Baiti"/>
+        <a:font script="Viet" typeface="Times New Roman"/>
+        <a:font script="Uigh" typeface="Microsoft Uighur"/>
+        <a:font script="Geor" typeface="Sylfaen"/>
+      </a:majorFont>
+      <a:minorFont>
+        <a:latin typeface="Arial"/>
+        <a:ea typeface=""/>
+        <a:cs typeface=""/>
+        <a:font script="Jpan" typeface="ＭＳ Ｐゴシック"/>
+        <a:font script="Hang" typeface="맑은 고딕"/>
+        <a:font script="Hans" typeface="宋体"/>
+        <a:font script="Hant" typeface="新細明體"/>
+        <a:font script="Arab" typeface="Arial"/>
+        <a:font script="Hebr" typeface="Arial"/>
+        <a:font script="Thai" typeface="Cordia New"/>
+        <a:font script="Ethi" typeface="Nyala"/>
+        <a:font script="Beng" typeface="Vrinda"/>
+        <a:font script="Gujr" typeface="Shruti"/>
+        <a:font script="Khmr" typeface="DaunPenh"/>
+        <a:font script="Knda" typeface="Tunga"/>
+        <a:font script="Guru" typeface="Raavi"/>
+        <a:font script="Cans" typeface="Euphemia"/>
+        <a:font script="Cher" typeface="Plantagenet Cherokee"/>
+        <a:font script="Yiii" typeface="Microsoft Yi Baiti"/>
+        <a:font script="Tibt" typeface="Microsoft Himalaya"/>
+        <a:font script="Thaa" typeface="MV Boli"/>
+        <a:font script="Deva" typeface="Mangal"/>
+        <a:font script="Telu" typeface="Gautami"/>
+        <a:font script="Taml" typeface="Latha"/>
+        <a:font script="Syrc" typeface="Estrangelo Edessa"/>
+        <a:font script="Orya" typeface="Kalinga"/>
+        <a:font script="Mlym" typeface="Kartika"/>
+        <a:font script="Laoo" typeface="DokChampa"/>
+        <a:font script="Sinh" typeface="Iskoola Pota"/>
+        <a:font script="Mong" typeface="Mongolian Baiti"/>
+        <a:font script="Viet" typeface="Arial"/>
+        <a:font script="Uigh" typeface="Microsoft Uighur"/>
+        <a:font script="Geor" typeface="Sylfaen"/>
+      </a:minorFont>
+    </a:fontScheme>
+    <a:fmtScheme name="Office">
+      <a:fillStyleLst>
+        <a:solidFill>
+          <a:schemeClr val="phClr"/>
+        </a:solidFill>
+        <a:gradFill rotWithShape="1">
+          <a:gsLst>
+            <a:gs pos="0">
+              <a:schemeClr val="phClr">
+                <a:tint val="50000"/>
+                <a:satMod val="300000"/>
+              </a:schemeClr>
+            </a:gs>
+            <a:gs pos="35000">
+              <a:schemeClr val="phClr">
+                <a:tint val="37000"/>
+                <a:satMod val="300000"/>
+              </a:schemeClr>
+            </a:gs>
+            <a:gs pos="100000">
+              <a:schemeClr val="phClr">
+                <a:tint val="15000"/>
+                <a:satMod val="350000"/>
+              </a:schemeClr>
+            </a:gs>
+          </a:gsLst>
+          <a:lin ang="16200000" scaled="1"/>
+        </a:gradFill>
+        <a:gradFill rotWithShape="1">
+          <a:gsLst>
+            <a:gs pos="0">
+              <a:schemeClr val="phClr">
+                <a:tint val="100000"/>
+                <a:shade val="100000"/>
+                <a:satMod val="130000"/>
+              </a:schemeClr>
+            </a:gs>
+            <a:gs pos="100000">
+              <a:schemeClr val="phClr">
+                <a:tint val="50000"/>
+                <a:shade val="100000"/>
+                <a:satMod val="350000"/>
+              </a:schemeClr>
+            </a:gs>
+          </a:gsLst>
+          <a:lin ang="16200000" scaled="0"/>
+        </a:gradFill>
+      </a:fillStyleLst>
+      <a:lnStyleLst>
+        <a:ln w="9525" cap="flat" cmpd="sng" algn="ctr">
+          <a:solidFill>
+            <a:schemeClr val="phClr">
+              <a:shade val="95000"/>
+              <a:satMod val="105000"/>
+            </a:schemeClr>
+          </a:solidFill>
+          <a:prstDash val="solid"/>
+        </a:ln>
+        <a:ln w="25400" cap="flat" cmpd="sng" algn="ctr">
+          <a:solidFill>
+            <a:schemeClr val="phClr"/>
+          </a:solidFill>
+          <a:prstDash val="solid"/>
+        </a:ln>
+        <a:ln w="38100" cap="flat" cmpd="sng" algn="ctr">
+          <a:solidFill>
+            <a:schemeClr val="phClr"/>
+          </a:solidFill>
+          <a:prstDash val="solid"/>
+        </a:ln>
+      </a:lnStyleLst>
+      <a:effectStyleLst>
+        <a:effectStyle>
+          <a:effectLst>
+            <a:outerShdw blurRad="40000" dist="20000" dir="5400000" rotWithShape="0">
+              <a:srgbClr val="000000">
+                <a:alpha val="38000"/>
+              </a:srgbClr>
+            </a:outerShdw>
+          </a:effectLst>
+        </a:effectStyle>
+        <a:effectStyle>
+          <a:effectLst>
+            <a:outerShdw blurRad="40000" dist="23000" dir="5400000" rotWithShape="0">
+              <a:srgbClr val="000000">
+                <a:alpha val="35000"/>
+              </a:srgbClr>
+            </a:outerShdw>
+          </a:effectLst>
+        </a:effectStyle>
+        <a:effectStyle>
+          <a:effectLst>
+            <a:outerShdw blurRad="40000" dist="23000" dir="5400000" rotWithShape="0">
+              <a:srgbClr val="000000">
+                <a:alpha val="35000"/>
+              </a:srgbClr>
+            </a:outerShdw>
+          </a:effectLst>
+          <a:scene3d>
+            <a:camera prst="orthographicFront">
+              <a:rot lat="0" lon="0" rev="0"/>
+            </a:camera>
+            <a:lightRig rig="threePt" dir="t">
+              <a:rot lat="0" lon="0" rev="1200000"/>
+            </a:lightRig>
+          </a:scene3d>
+          <a:sp3d>
+            <a:bevelT w="63500" h="25400"/>
+          </a:sp3d>
+        </a:effectStyle>
+      </a:effectStyleLst>
+      <a:bgFillStyleLst>
+        <a:solidFill>
+          <a:schemeClr val="phClr"/>
+        </a:solidFill>
+        <a:gradFill rotWithShape="1">
+          <a:gsLst>
+            <a:gs pos="0">
+              <a:schemeClr val="phClr">
+                <a:tint val="40000"/>
+                <a:satMod val="350000"/>
+              </a:schemeClr>
+            </a:gs>
+            <a:gs pos="40000">
+              <a:schemeClr val="phClr">
+                <a:tint val="45000"/>
+                <a:shade val="99000"/>
+                <a:satMod val="350000"/>
+              </a:schemeClr>
+            </a:gs>
+            <a:gs pos="100000">
+              <a:schemeClr val="phClr">
+                <a:shade val="20000"/>
+                <a:satMod val="255000"/>
+              </a:schemeClr>
+            </a:gs>
+          </a:gsLst>
+          <a:path path="circle">
+            <a:fillToRect l="50000" t="-80000" r="50000" b="180000"/>
+          </a:path>
+        </a:gradFill>
+        <a:gradFill rotWithShape="1">
+          <a:gsLst>
+            <a:gs pos="0">
+              <a:schemeClr val="phClr">
+                <a:tint val="80000"/>
+                <a:satMod val="300000"/>
+              </a:schemeClr>
+            </a:gs>
+            <a:gs pos="100000">
+              <a:schemeClr val="phClr">
+                <a:shade val="30000"/>
+                <a:satMod val="200000"/>
+              </a:schemeClr>
+            </a:gs>
+          </a:gsLst>
+          <a:path path="circle">
+            <a:fillToRect l="50000" t="50000" r="50000" b="50000"/>
+          </a:path>
+        </a:gradFill>
+      </a:bgFillStyleLst>
+    </a:fmtScheme>
+  </a:themeElements>
+</a:theme>
+</file>
+
+<file path=ppt/theme/theme2.xml><?xml version="1.0" encoding="utf-8"?>
 <a:theme xmlns:a="http://schemas.openxmlformats.org/drawingml/2006/main" xmlns:r="http://schemas.openxmlformats.org/officeDocument/2006/relationships" name="Simple Light">
   <a:themeElements>
     <a:clrScheme name="Simple Light">
@@ -14460,283 +14629,4 @@
     </a:fmtScheme>
   </a:themeElements>
 </a:theme>
-</file>
-
-<file path=ppt/theme/theme2.xml><?xml version="1.0" encoding="utf-8"?>
-<a:theme xmlns:a="http://schemas.openxmlformats.org/drawingml/2006/main" xmlns:r="http://schemas.openxmlformats.org/officeDocument/2006/relationships">
-  <a:themeElements>
-    <a:clrScheme name="Default">
-      <a:dk1>
-        <a:srgbClr val="000000"/>
-      </a:dk1>
-      <a:lt1>
-        <a:srgbClr val="FFFFFF"/>
-      </a:lt1>
-      <a:dk2>
-        <a:srgbClr val="158158"/>
-      </a:dk2>
-      <a:lt2>
-        <a:srgbClr val="F3F3F3"/>
-      </a:lt2>
-      <a:accent1>
-        <a:srgbClr val="058DC7"/>
-      </a:accent1>
-      <a:accent2>
-        <a:srgbClr val="50B432"/>
-      </a:accent2>
-      <a:accent3>
-        <a:srgbClr val="ED561B"/>
-      </a:accent3>
-      <a:accent4>
-        <a:srgbClr val="EDEF00"/>
-      </a:accent4>
-      <a:accent5>
-        <a:srgbClr val="24CBE5"/>
-      </a:accent5>
-      <a:accent6>
-        <a:srgbClr val="64E572"/>
-      </a:accent6>
-      <a:hlink>
-        <a:srgbClr val="2200CC"/>
-      </a:hlink>
-      <a:folHlink>
-        <a:srgbClr val="551A8B"/>
-      </a:folHlink>
-    </a:clrScheme>
-    <a:fontScheme name="Office">
-      <a:majorFont>
-        <a:latin typeface="Arial"/>
-        <a:ea typeface=""/>
-        <a:cs typeface=""/>
-        <a:font script="Jpan" typeface="ＭＳ Ｐゴシック"/>
-        <a:font script="Hang" typeface="맑은 고딕"/>
-        <a:font script="Hans" typeface="宋体"/>
-        <a:font script="Hant" typeface="新細明體"/>
-        <a:font script="Arab" typeface="Times New Roman"/>
-        <a:font script="Hebr" typeface="Times New Roman"/>
-        <a:font script="Thai" typeface="Angsana New"/>
-        <a:font script="Ethi" typeface="Nyala"/>
-        <a:font script="Beng" typeface="Vrinda"/>
-        <a:font script="Gujr" typeface="Shruti"/>
-        <a:font script="Khmr" typeface="MoolBoran"/>
-        <a:font script="Knda" typeface="Tunga"/>
-        <a:font script="Guru" typeface="Raavi"/>
-        <a:font script="Cans" typeface="Euphemia"/>
-        <a:font script="Cher" typeface="Plantagenet Cherokee"/>
-        <a:font script="Yiii" typeface="Microsoft Yi Baiti"/>
-        <a:font script="Tibt" typeface="Microsoft Himalaya"/>
-        <a:font script="Thaa" typeface="MV Boli"/>
-        <a:font script="Deva" typeface="Mangal"/>
-        <a:font script="Telu" typeface="Gautami"/>
-        <a:font script="Taml" typeface="Latha"/>
-        <a:font script="Syrc" typeface="Estrangelo Edessa"/>
-        <a:font script="Orya" typeface="Kalinga"/>
-        <a:font script="Mlym" typeface="Kartika"/>
-        <a:font script="Laoo" typeface="DokChampa"/>
-        <a:font script="Sinh" typeface="Iskoola Pota"/>
-        <a:font script="Mong" typeface="Mongolian Baiti"/>
-        <a:font script="Viet" typeface="Times New Roman"/>
-        <a:font script="Uigh" typeface="Microsoft Uighur"/>
-        <a:font script="Geor" typeface="Sylfaen"/>
-      </a:majorFont>
-      <a:minorFont>
-        <a:latin typeface="Arial"/>
-        <a:ea typeface=""/>
-        <a:cs typeface=""/>
-        <a:font script="Jpan" typeface="ＭＳ Ｐゴシック"/>
-        <a:font script="Hang" typeface="맑은 고딕"/>
-        <a:font script="Hans" typeface="宋体"/>
-        <a:font script="Hant" typeface="新細明體"/>
-        <a:font script="Arab" typeface="Arial"/>
-        <a:font script="Hebr" typeface="Arial"/>
-        <a:font script="Thai" typeface="Cordia New"/>
-        <a:font script="Ethi" typeface="Nyala"/>
-        <a:font script="Beng" typeface="Vrinda"/>
-        <a:font script="Gujr" typeface="Shruti"/>
-        <a:font script="Khmr" typeface="DaunPenh"/>
-        <a:font script="Knda" typeface="Tunga"/>
-        <a:font script="Guru" typeface="Raavi"/>
-        <a:font script="Cans" typeface="Euphemia"/>
-        <a:font script="Cher" typeface="Plantagenet Cherokee"/>
-        <a:font script="Yiii" typeface="Microsoft Yi Baiti"/>
-        <a:font script="Tibt" typeface="Microsoft Himalaya"/>
-        <a:font script="Thaa" typeface="MV Boli"/>
-        <a:font script="Deva" typeface="Mangal"/>
-        <a:font script="Telu" typeface="Gautami"/>
-        <a:font script="Taml" typeface="Latha"/>
-        <a:font script="Syrc" typeface="Estrangelo Edessa"/>
-        <a:font script="Orya" typeface="Kalinga"/>
-        <a:font script="Mlym" typeface="Kartika"/>
-        <a:font script="Laoo" typeface="DokChampa"/>
-        <a:font script="Sinh" typeface="Iskoola Pota"/>
-        <a:font script="Mong" typeface="Mongolian Baiti"/>
-        <a:font script="Viet" typeface="Arial"/>
-        <a:font script="Uigh" typeface="Microsoft Uighur"/>
-        <a:font script="Geor" typeface="Sylfaen"/>
-      </a:minorFont>
-    </a:fontScheme>
-    <a:fmtScheme name="Office">
-      <a:fillStyleLst>
-        <a:solidFill>
-          <a:schemeClr val="phClr"/>
-        </a:solidFill>
-        <a:gradFill rotWithShape="1">
-          <a:gsLst>
-            <a:gs pos="0">
-              <a:schemeClr val="phClr">
-                <a:tint val="50000"/>
-                <a:satMod val="300000"/>
-              </a:schemeClr>
-            </a:gs>
-            <a:gs pos="35000">
-              <a:schemeClr val="phClr">
-                <a:tint val="37000"/>
-                <a:satMod val="300000"/>
-              </a:schemeClr>
-            </a:gs>
-            <a:gs pos="100000">
-              <a:schemeClr val="phClr">
-                <a:tint val="15000"/>
-                <a:satMod val="350000"/>
-              </a:schemeClr>
-            </a:gs>
-          </a:gsLst>
-          <a:lin ang="16200000" scaled="1"/>
-        </a:gradFill>
-        <a:gradFill rotWithShape="1">
-          <a:gsLst>
-            <a:gs pos="0">
-              <a:schemeClr val="phClr">
-                <a:tint val="100000"/>
-                <a:shade val="100000"/>
-                <a:satMod val="130000"/>
-              </a:schemeClr>
-            </a:gs>
-            <a:gs pos="100000">
-              <a:schemeClr val="phClr">
-                <a:tint val="50000"/>
-                <a:shade val="100000"/>
-                <a:satMod val="350000"/>
-              </a:schemeClr>
-            </a:gs>
-          </a:gsLst>
-          <a:lin ang="16200000" scaled="0"/>
-        </a:gradFill>
-      </a:fillStyleLst>
-      <a:lnStyleLst>
-        <a:ln w="9525" cap="flat" cmpd="sng" algn="ctr">
-          <a:solidFill>
-            <a:schemeClr val="phClr">
-              <a:shade val="95000"/>
-              <a:satMod val="105000"/>
-            </a:schemeClr>
-          </a:solidFill>
-          <a:prstDash val="solid"/>
-        </a:ln>
-        <a:ln w="25400" cap="flat" cmpd="sng" algn="ctr">
-          <a:solidFill>
-            <a:schemeClr val="phClr"/>
-          </a:solidFill>
-          <a:prstDash val="solid"/>
-        </a:ln>
-        <a:ln w="38100" cap="flat" cmpd="sng" algn="ctr">
-          <a:solidFill>
-            <a:schemeClr val="phClr"/>
-          </a:solidFill>
-          <a:prstDash val="solid"/>
-        </a:ln>
-      </a:lnStyleLst>
-      <a:effectStyleLst>
-        <a:effectStyle>
-          <a:effectLst>
-            <a:outerShdw blurRad="40000" dist="20000" dir="5400000" rotWithShape="0">
-              <a:srgbClr val="000000">
-                <a:alpha val="38000"/>
-              </a:srgbClr>
-            </a:outerShdw>
-          </a:effectLst>
-        </a:effectStyle>
-        <a:effectStyle>
-          <a:effectLst>
-            <a:outerShdw blurRad="40000" dist="23000" dir="5400000" rotWithShape="0">
-              <a:srgbClr val="000000">
-                <a:alpha val="35000"/>
-              </a:srgbClr>
-            </a:outerShdw>
-          </a:effectLst>
-        </a:effectStyle>
-        <a:effectStyle>
-          <a:effectLst>
-            <a:outerShdw blurRad="40000" dist="23000" dir="5400000" rotWithShape="0">
-              <a:srgbClr val="000000">
-                <a:alpha val="35000"/>
-              </a:srgbClr>
-            </a:outerShdw>
-          </a:effectLst>
-          <a:scene3d>
-            <a:camera prst="orthographicFront">
-              <a:rot lat="0" lon="0" rev="0"/>
-            </a:camera>
-            <a:lightRig rig="threePt" dir="t">
-              <a:rot lat="0" lon="0" rev="1200000"/>
-            </a:lightRig>
-          </a:scene3d>
-          <a:sp3d>
-            <a:bevelT w="63500" h="25400"/>
-          </a:sp3d>
-        </a:effectStyle>
-      </a:effectStyleLst>
-      <a:bgFillStyleLst>
-        <a:solidFill>
-          <a:schemeClr val="phClr"/>
-        </a:solidFill>
-        <a:gradFill rotWithShape="1">
-          <a:gsLst>
-            <a:gs pos="0">
-              <a:schemeClr val="phClr">
-                <a:tint val="40000"/>
-                <a:satMod val="350000"/>
-              </a:schemeClr>
-            </a:gs>
-            <a:gs pos="40000">
-              <a:schemeClr val="phClr">
-                <a:tint val="45000"/>
-                <a:shade val="99000"/>
-                <a:satMod val="350000"/>
-              </a:schemeClr>
-            </a:gs>
-            <a:gs pos="100000">
-              <a:schemeClr val="phClr">
-                <a:shade val="20000"/>
-                <a:satMod val="255000"/>
-              </a:schemeClr>
-            </a:gs>
-          </a:gsLst>
-          <a:path path="circle">
-            <a:fillToRect l="50000" t="-80000" r="50000" b="180000"/>
-          </a:path>
-        </a:gradFill>
-        <a:gradFill rotWithShape="1">
-          <a:gsLst>
-            <a:gs pos="0">
-              <a:schemeClr val="phClr">
-                <a:tint val="80000"/>
-                <a:satMod val="300000"/>
-              </a:schemeClr>
-            </a:gs>
-            <a:gs pos="100000">
-              <a:schemeClr val="phClr">
-                <a:shade val="30000"/>
-                <a:satMod val="200000"/>
-              </a:schemeClr>
-            </a:gs>
-          </a:gsLst>
-          <a:path path="circle">
-            <a:fillToRect l="50000" t="50000" r="50000" b="50000"/>
-          </a:path>
-        </a:gradFill>
-      </a:bgFillStyleLst>
-    </a:fmtScheme>
-  </a:themeElements>
-</a:theme>
 </file>
--- a/master_template.pptx
+++ b/master_template.pptx
@@ -10799,7 +10799,7 @@
                 <a:cs typeface="Calibri"/>
                 <a:sym typeface="Calibri"/>
               </a:rPr>
-              <a:t>{{upside_percentage}}%</a:t>
+              <a:t>{{upside_percentage}}</a:t>
             </a:r>
             <a:endParaRPr sz="1400">
               <a:latin typeface="Calibri"/>
@@ -14074,6 +14074,285 @@
 </file>
 
 <file path=ppt/theme/theme1.xml><?xml version="1.0" encoding="utf-8"?>
+<a:theme xmlns:a="http://schemas.openxmlformats.org/drawingml/2006/main" xmlns:r="http://schemas.openxmlformats.org/officeDocument/2006/relationships" name="Simple Light">
+  <a:themeElements>
+    <a:clrScheme name="Simple Light">
+      <a:dk1>
+        <a:srgbClr val="000000"/>
+      </a:dk1>
+      <a:lt1>
+        <a:srgbClr val="FFFFFF"/>
+      </a:lt1>
+      <a:dk2>
+        <a:srgbClr val="595959"/>
+      </a:dk2>
+      <a:lt2>
+        <a:srgbClr val="EEEEEE"/>
+      </a:lt2>
+      <a:accent1>
+        <a:srgbClr val="4285F4"/>
+      </a:accent1>
+      <a:accent2>
+        <a:srgbClr val="212121"/>
+      </a:accent2>
+      <a:accent3>
+        <a:srgbClr val="78909C"/>
+      </a:accent3>
+      <a:accent4>
+        <a:srgbClr val="FFAB40"/>
+      </a:accent4>
+      <a:accent5>
+        <a:srgbClr val="0097A7"/>
+      </a:accent5>
+      <a:accent6>
+        <a:srgbClr val="EEFF41"/>
+      </a:accent6>
+      <a:hlink>
+        <a:srgbClr val="0097A7"/>
+      </a:hlink>
+      <a:folHlink>
+        <a:srgbClr val="0097A7"/>
+      </a:folHlink>
+    </a:clrScheme>
+    <a:fontScheme name="Office">
+      <a:majorFont>
+        <a:latin typeface="Arial"/>
+        <a:ea typeface=""/>
+        <a:cs typeface=""/>
+        <a:font script="Jpan" typeface="ＭＳ Ｐゴシック"/>
+        <a:font script="Hang" typeface="맑은 고딕"/>
+        <a:font script="Hans" typeface="宋体"/>
+        <a:font script="Hant" typeface="新細明體"/>
+        <a:font script="Arab" typeface="Times New Roman"/>
+        <a:font script="Hebr" typeface="Times New Roman"/>
+        <a:font script="Thai" typeface="Angsana New"/>
+        <a:font script="Ethi" typeface="Nyala"/>
+        <a:font script="Beng" typeface="Vrinda"/>
+        <a:font script="Gujr" typeface="Shruti"/>
+        <a:font script="Khmr" typeface="MoolBoran"/>
+        <a:font script="Knda" typeface="Tunga"/>
+        <a:font script="Guru" typeface="Raavi"/>
+        <a:font script="Cans" typeface="Euphemia"/>
+        <a:font script="Cher" typeface="Plantagenet Cherokee"/>
+        <a:font script="Yiii" typeface="Microsoft Yi Baiti"/>
+        <a:font script="Tibt" typeface="Microsoft Himalaya"/>
+        <a:font script="Thaa" typeface="MV Boli"/>
+        <a:font script="Deva" typeface="Mangal"/>
+        <a:font script="Telu" typeface="Gautami"/>
+        <a:font script="Taml" typeface="Latha"/>
+        <a:font script="Syrc" typeface="Estrangelo Edessa"/>
+        <a:font script="Orya" typeface="Kalinga"/>
+        <a:font script="Mlym" typeface="Kartika"/>
+        <a:font script="Laoo" typeface="DokChampa"/>
+        <a:font script="Sinh" typeface="Iskoola Pota"/>
+        <a:font script="Mong" typeface="Mongolian Baiti"/>
+        <a:font script="Viet" typeface="Times New Roman"/>
+        <a:font script="Uigh" typeface="Microsoft Uighur"/>
+        <a:font script="Geor" typeface="Sylfaen"/>
+      </a:majorFont>
+      <a:minorFont>
+        <a:latin typeface="Arial"/>
+        <a:ea typeface=""/>
+        <a:cs typeface=""/>
+        <a:font script="Jpan" typeface="ＭＳ Ｐゴシック"/>
+        <a:font script="Hang" typeface="맑은 고딕"/>
+        <a:font script="Hans" typeface="宋体"/>
+        <a:font script="Hant" typeface="新細明體"/>
+        <a:font script="Arab" typeface="Arial"/>
+        <a:font script="Hebr" typeface="Arial"/>
+        <a:font script="Thai" typeface="Cordia New"/>
+        <a:font script="Ethi" typeface="Nyala"/>
+        <a:font script="Beng" typeface="Vrinda"/>
+        <a:font script="Gujr" typeface="Shruti"/>
+        <a:font script="Khmr" typeface="DaunPenh"/>
+        <a:font script="Knda" typeface="Tunga"/>
+        <a:font script="Guru" typeface="Raavi"/>
+        <a:font script="Cans" typeface="Euphemia"/>
+        <a:font script="Cher" typeface="Plantagenet Cherokee"/>
+        <a:font script="Yiii" typeface="Microsoft Yi Baiti"/>
+        <a:font script="Tibt" typeface="Microsoft Himalaya"/>
+        <a:font script="Thaa" typeface="MV Boli"/>
+        <a:font script="Deva" typeface="Mangal"/>
+        <a:font script="Telu" typeface="Gautami"/>
+        <a:font script="Taml" typeface="Latha"/>
+        <a:font script="Syrc" typeface="Estrangelo Edessa"/>
+        <a:font script="Orya" typeface="Kalinga"/>
+        <a:font script="Mlym" typeface="Kartika"/>
+        <a:font script="Laoo" typeface="DokChampa"/>
+        <a:font script="Sinh" typeface="Iskoola Pota"/>
+        <a:font script="Mong" typeface="Mongolian Baiti"/>
+        <a:font script="Viet" typeface="Arial"/>
+        <a:font script="Uigh" typeface="Microsoft Uighur"/>
+        <a:font script="Geor" typeface="Sylfaen"/>
+      </a:minorFont>
+    </a:fontScheme>
+    <a:fmtScheme name="Office">
+      <a:fillStyleLst>
+        <a:solidFill>
+          <a:schemeClr val="phClr"/>
+        </a:solidFill>
+        <a:gradFill rotWithShape="1">
+          <a:gsLst>
+            <a:gs pos="0">
+              <a:schemeClr val="phClr">
+                <a:tint val="50000"/>
+                <a:satMod val="300000"/>
+              </a:schemeClr>
+            </a:gs>
+            <a:gs pos="35000">
+              <a:schemeClr val="phClr">
+                <a:tint val="37000"/>
+                <a:satMod val="300000"/>
+              </a:schemeClr>
+            </a:gs>
+            <a:gs pos="100000">
+              <a:schemeClr val="phClr">
+                <a:tint val="15000"/>
+                <a:satMod val="350000"/>
+              </a:schemeClr>
+            </a:gs>
+          </a:gsLst>
+          <a:lin ang="16200000" scaled="1"/>
+        </a:gradFill>
+        <a:gradFill rotWithShape="1">
+          <a:gsLst>
+            <a:gs pos="0">
+              <a:schemeClr val="phClr">
+                <a:tint val="100000"/>
+                <a:shade val="100000"/>
+                <a:satMod val="130000"/>
+              </a:schemeClr>
+            </a:gs>
+            <a:gs pos="100000">
+              <a:schemeClr val="phClr">
+                <a:tint val="50000"/>
+                <a:shade val="100000"/>
+                <a:satMod val="350000"/>
+              </a:schemeClr>
+            </a:gs>
+          </a:gsLst>
+          <a:lin ang="16200000" scaled="0"/>
+        </a:gradFill>
+      </a:fillStyleLst>
+      <a:lnStyleLst>
+        <a:ln w="9525" cap="flat" cmpd="sng" algn="ctr">
+          <a:solidFill>
+            <a:schemeClr val="phClr">
+              <a:shade val="95000"/>
+              <a:satMod val="105000"/>
+            </a:schemeClr>
+          </a:solidFill>
+          <a:prstDash val="solid"/>
+        </a:ln>
+        <a:ln w="25400" cap="flat" cmpd="sng" algn="ctr">
+          <a:solidFill>
+            <a:schemeClr val="phClr"/>
+          </a:solidFill>
+          <a:prstDash val="solid"/>
+        </a:ln>
+        <a:ln w="38100" cap="flat" cmpd="sng" algn="ctr">
+          <a:solidFill>
+            <a:schemeClr val="phClr"/>
+          </a:solidFill>
+          <a:prstDash val="solid"/>
+        </a:ln>
+      </a:lnStyleLst>
+      <a:effectStyleLst>
+        <a:effectStyle>
+          <a:effectLst>
+            <a:outerShdw blurRad="40000" dist="20000" dir="5400000" rotWithShape="0">
+              <a:srgbClr val="000000">
+                <a:alpha val="38000"/>
+              </a:srgbClr>
+            </a:outerShdw>
+          </a:effectLst>
+        </a:effectStyle>
+        <a:effectStyle>
+          <a:effectLst>
+            <a:outerShdw blurRad="40000" dist="23000" dir="5400000" rotWithShape="0">
+              <a:srgbClr val="000000">
+                <a:alpha val="35000"/>
+              </a:srgbClr>
+            </a:outerShdw>
+          </a:effectLst>
+        </a:effectStyle>
+        <a:effectStyle>
+          <a:effectLst>
+            <a:outerShdw blurRad="40000" dist="23000" dir="5400000" rotWithShape="0">
+              <a:srgbClr val="000000">
+                <a:alpha val="35000"/>
+              </a:srgbClr>
+            </a:outerShdw>
+          </a:effectLst>
+          <a:scene3d>
+            <a:camera prst="orthographicFront">
+              <a:rot lat="0" lon="0" rev="0"/>
+            </a:camera>
+            <a:lightRig rig="threePt" dir="t">
+              <a:rot lat="0" lon="0" rev="1200000"/>
+            </a:lightRig>
+          </a:scene3d>
+          <a:sp3d>
+            <a:bevelT w="63500" h="25400"/>
+          </a:sp3d>
+        </a:effectStyle>
+      </a:effectStyleLst>
+      <a:bgFillStyleLst>
+        <a:solidFill>
+          <a:schemeClr val="phClr"/>
+        </a:solidFill>
+        <a:gradFill rotWithShape="1">
+          <a:gsLst>
+            <a:gs pos="0">
+              <a:schemeClr val="phClr">
+                <a:tint val="40000"/>
+                <a:satMod val="350000"/>
+              </a:schemeClr>
+            </a:gs>
+            <a:gs pos="40000">
+              <a:schemeClr val="phClr">
+                <a:tint val="45000"/>
+                <a:shade val="99000"/>
+                <a:satMod val="350000"/>
+              </a:schemeClr>
+            </a:gs>
+            <a:gs pos="100000">
+              <a:schemeClr val="phClr">
+                <a:shade val="20000"/>
+                <a:satMod val="255000"/>
+              </a:schemeClr>
+            </a:gs>
+          </a:gsLst>
+          <a:path path="circle">
+            <a:fillToRect l="50000" t="-80000" r="50000" b="180000"/>
+          </a:path>
+        </a:gradFill>
+        <a:gradFill rotWithShape="1">
+          <a:gsLst>
+            <a:gs pos="0">
+              <a:schemeClr val="phClr">
+                <a:tint val="80000"/>
+                <a:satMod val="300000"/>
+              </a:schemeClr>
+            </a:gs>
+            <a:gs pos="100000">
+              <a:schemeClr val="phClr">
+                <a:shade val="30000"/>
+                <a:satMod val="200000"/>
+              </a:schemeClr>
+            </a:gs>
+          </a:gsLst>
+          <a:path path="circle">
+            <a:fillToRect l="50000" t="50000" r="50000" b="50000"/>
+          </a:path>
+        </a:gradFill>
+      </a:bgFillStyleLst>
+    </a:fmtScheme>
+  </a:themeElements>
+</a:theme>
+</file>
+
+<file path=ppt/theme/theme2.xml><?xml version="1.0" encoding="utf-8"?>
 <a:theme xmlns:a="http://schemas.openxmlformats.org/drawingml/2006/main" xmlns:r="http://schemas.openxmlformats.org/officeDocument/2006/relationships">
   <a:themeElements>
     <a:clrScheme name="Default">
@@ -14350,283 +14629,4 @@
     </a:fmtScheme>
   </a:themeElements>
 </a:theme>
-</file>
-
-<file path=ppt/theme/theme2.xml><?xml version="1.0" encoding="utf-8"?>
-<a:theme xmlns:a="http://schemas.openxmlformats.org/drawingml/2006/main" xmlns:r="http://schemas.openxmlformats.org/officeDocument/2006/relationships" name="Simple Light">
-  <a:themeElements>
-    <a:clrScheme name="Simple Light">
-      <a:dk1>
-        <a:srgbClr val="000000"/>
-      </a:dk1>
-      <a:lt1>
-        <a:srgbClr val="FFFFFF"/>
-      </a:lt1>
-      <a:dk2>
-        <a:srgbClr val="595959"/>
-      </a:dk2>
-      <a:lt2>
-        <a:srgbClr val="EEEEEE"/>
-      </a:lt2>
-      <a:accent1>
-        <a:srgbClr val="4285F4"/>
-      </a:accent1>
-      <a:accent2>
-        <a:srgbClr val="212121"/>
-      </a:accent2>
-      <a:accent3>
-        <a:srgbClr val="78909C"/>
-      </a:accent3>
-      <a:accent4>
-        <a:srgbClr val="FFAB40"/>
-      </a:accent4>
-      <a:accent5>
-        <a:srgbClr val="0097A7"/>
-      </a:accent5>
-      <a:accent6>
-        <a:srgbClr val="EEFF41"/>
-      </a:accent6>
-      <a:hlink>
-        <a:srgbClr val="0097A7"/>
-      </a:hlink>
-      <a:folHlink>
-        <a:srgbClr val="0097A7"/>
-      </a:folHlink>
-    </a:clrScheme>
-    <a:fontScheme name="Office">
-      <a:majorFont>
-        <a:latin typeface="Arial"/>
-        <a:ea typeface=""/>
-        <a:cs typeface=""/>
-        <a:font script="Jpan" typeface="ＭＳ Ｐゴシック"/>
-        <a:font script="Hang" typeface="맑은 고딕"/>
-        <a:font script="Hans" typeface="宋体"/>
-        <a:font script="Hant" typeface="新細明體"/>
-        <a:font script="Arab" typeface="Times New Roman"/>
-        <a:font script="Hebr" typeface="Times New Roman"/>
-        <a:font script="Thai" typeface="Angsana New"/>
-        <a:font script="Ethi" typeface="Nyala"/>
-        <a:font script="Beng" typeface="Vrinda"/>
-        <a:font script="Gujr" typeface="Shruti"/>
-        <a:font script="Khmr" typeface="MoolBoran"/>
-        <a:font script="Knda" typeface="Tunga"/>
-        <a:font script="Guru" typeface="Raavi"/>
-        <a:font script="Cans" typeface="Euphemia"/>
-        <a:font script="Cher" typeface="Plantagenet Cherokee"/>
-        <a:font script="Yiii" typeface="Microsoft Yi Baiti"/>
-        <a:font script="Tibt" typeface="Microsoft Himalaya"/>
-        <a:font script="Thaa" typeface="MV Boli"/>
-        <a:font script="Deva" typeface="Mangal"/>
-        <a:font script="Telu" typeface="Gautami"/>
-        <a:font script="Taml" typeface="Latha"/>
-        <a:font script="Syrc" typeface="Estrangelo Edessa"/>
-        <a:font script="Orya" typeface="Kalinga"/>
-        <a:font script="Mlym" typeface="Kartika"/>
-        <a:font script="Laoo" typeface="DokChampa"/>
-        <a:font script="Sinh" typeface="Iskoola Pota"/>
-        <a:font script="Mong" typeface="Mongolian Baiti"/>
-        <a:font script="Viet" typeface="Times New Roman"/>
-        <a:font script="Uigh" typeface="Microsoft Uighur"/>
-        <a:font script="Geor" typeface="Sylfaen"/>
-      </a:majorFont>
-      <a:minorFont>
-        <a:latin typeface="Arial"/>
-        <a:ea typeface=""/>
-        <a:cs typeface=""/>
-        <a:font script="Jpan" typeface="ＭＳ Ｐゴシック"/>
-        <a:font script="Hang" typeface="맑은 고딕"/>
-        <a:font script="Hans" typeface="宋体"/>
-        <a:font script="Hant" typeface="新細明體"/>
-        <a:font script="Arab" typeface="Arial"/>
-        <a:font script="Hebr" typeface="Arial"/>
-        <a:font script="Thai" typeface="Cordia New"/>
-        <a:font script="Ethi" typeface="Nyala"/>
-        <a:font script="Beng" typeface="Vrinda"/>
-        <a:font script="Gujr" typeface="Shruti"/>
-        <a:font script="Khmr" typeface="DaunPenh"/>
-        <a:font script="Knda" typeface="Tunga"/>
-        <a:font script="Guru" typeface="Raavi"/>
-        <a:font script="Cans" typeface="Euphemia"/>
-        <a:font script="Cher" typeface="Plantagenet Cherokee"/>
-        <a:font script="Yiii" typeface="Microsoft Yi Baiti"/>
-        <a:font script="Tibt" typeface="Microsoft Himalaya"/>
-        <a:font script="Thaa" typeface="MV Boli"/>
-        <a:font script="Deva" typeface="Mangal"/>
-        <a:font script="Telu" typeface="Gautami"/>
-        <a:font script="Taml" typeface="Latha"/>
-        <a:font script="Syrc" typeface="Estrangelo Edessa"/>
-        <a:font script="Orya" typeface="Kalinga"/>
-        <a:font script="Mlym" typeface="Kartika"/>
-        <a:font script="Laoo" typeface="DokChampa"/>
-        <a:font script="Sinh" typeface="Iskoola Pota"/>
-        <a:font script="Mong" typeface="Mongolian Baiti"/>
-        <a:font script="Viet" typeface="Arial"/>
-        <a:font script="Uigh" typeface="Microsoft Uighur"/>
-        <a:font script="Geor" typeface="Sylfaen"/>
-      </a:minorFont>
-    </a:fontScheme>
-    <a:fmtScheme name="Office">
-      <a:fillStyleLst>
-        <a:solidFill>
-          <a:schemeClr val="phClr"/>
-        </a:solidFill>
-        <a:gradFill rotWithShape="1">
-          <a:gsLst>
-            <a:gs pos="0">
-              <a:schemeClr val="phClr">
-                <a:tint val="50000"/>
-                <a:satMod val="300000"/>
-              </a:schemeClr>
-            </a:gs>
-            <a:gs pos="35000">
-              <a:schemeClr val="phClr">
-                <a:tint val="37000"/>
-                <a:satMod val="300000"/>
-              </a:schemeClr>
-            </a:gs>
-            <a:gs pos="100000">
-              <a:schemeClr val="phClr">
-                <a:tint val="15000"/>
-                <a:satMod val="350000"/>
-              </a:schemeClr>
-            </a:gs>
-          </a:gsLst>
-          <a:lin ang="16200000" scaled="1"/>
-        </a:gradFill>
-        <a:gradFill rotWithShape="1">
-          <a:gsLst>
-            <a:gs pos="0">
-              <a:schemeClr val="phClr">
-                <a:tint val="100000"/>
-                <a:shade val="100000"/>
-                <a:satMod val="130000"/>
-              </a:schemeClr>
-            </a:gs>
-            <a:gs pos="100000">
-              <a:schemeClr val="phClr">
-                <a:tint val="50000"/>
-                <a:shade val="100000"/>
-                <a:satMod val="350000"/>
-              </a:schemeClr>
-            </a:gs>
-          </a:gsLst>
-          <a:lin ang="16200000" scaled="0"/>
-        </a:gradFill>
-      </a:fillStyleLst>
-      <a:lnStyleLst>
-        <a:ln w="9525" cap="flat" cmpd="sng" algn="ctr">
-          <a:solidFill>
-            <a:schemeClr val="phClr">
-              <a:shade val="95000"/>
-              <a:satMod val="105000"/>
-            </a:schemeClr>
-          </a:solidFill>
-          <a:prstDash val="solid"/>
-        </a:ln>
-        <a:ln w="25400" cap="flat" cmpd="sng" algn="ctr">
-          <a:solidFill>
-            <a:schemeClr val="phClr"/>
-          </a:solidFill>
-          <a:prstDash val="solid"/>
-        </a:ln>
-        <a:ln w="38100" cap="flat" cmpd="sng" algn="ctr">
-          <a:solidFill>
-            <a:schemeClr val="phClr"/>
-          </a:solidFill>
-          <a:prstDash val="solid"/>
-        </a:ln>
-      </a:lnStyleLst>
-      <a:effectStyleLst>
-        <a:effectStyle>
-          <a:effectLst>
-            <a:outerShdw blurRad="40000" dist="20000" dir="5400000" rotWithShape="0">
-              <a:srgbClr val="000000">
-                <a:alpha val="38000"/>
-              </a:srgbClr>
-            </a:outerShdw>
-          </a:effectLst>
-        </a:effectStyle>
-        <a:effectStyle>
-          <a:effectLst>
-            <a:outerShdw blurRad="40000" dist="23000" dir="5400000" rotWithShape="0">
-              <a:srgbClr val="000000">
-                <a:alpha val="35000"/>
-              </a:srgbClr>
-            </a:outerShdw>
-          </a:effectLst>
-        </a:effectStyle>
-        <a:effectStyle>
-          <a:effectLst>
-            <a:outerShdw blurRad="40000" dist="23000" dir="5400000" rotWithShape="0">
-              <a:srgbClr val="000000">
-                <a:alpha val="35000"/>
-              </a:srgbClr>
-            </a:outerShdw>
-          </a:effectLst>
-          <a:scene3d>
-            <a:camera prst="orthographicFront">
-              <a:rot lat="0" lon="0" rev="0"/>
-            </a:camera>
-            <a:lightRig rig="threePt" dir="t">
-              <a:rot lat="0" lon="0" rev="1200000"/>
-            </a:lightRig>
-          </a:scene3d>
-          <a:sp3d>
-            <a:bevelT w="63500" h="25400"/>
-          </a:sp3d>
-        </a:effectStyle>
-      </a:effectStyleLst>
-      <a:bgFillStyleLst>
-        <a:solidFill>
-          <a:schemeClr val="phClr"/>
-        </a:solidFill>
-        <a:gradFill rotWithShape="1">
-          <a:gsLst>
-            <a:gs pos="0">
-              <a:schemeClr val="phClr">
-                <a:tint val="40000"/>
-                <a:satMod val="350000"/>
-              </a:schemeClr>
-            </a:gs>
-            <a:gs pos="40000">
-              <a:schemeClr val="phClr">
-                <a:tint val="45000"/>
-                <a:shade val="99000"/>
-                <a:satMod val="350000"/>
-              </a:schemeClr>
-            </a:gs>
-            <a:gs pos="100000">
-              <a:schemeClr val="phClr">
-                <a:shade val="20000"/>
-                <a:satMod val="255000"/>
-              </a:schemeClr>
-            </a:gs>
-          </a:gsLst>
-          <a:path path="circle">
-            <a:fillToRect l="50000" t="-80000" r="50000" b="180000"/>
-          </a:path>
-        </a:gradFill>
-        <a:gradFill rotWithShape="1">
-          <a:gsLst>
-            <a:gs pos="0">
-              <a:schemeClr val="phClr">
-                <a:tint val="80000"/>
-                <a:satMod val="300000"/>
-              </a:schemeClr>
-            </a:gs>
-            <a:gs pos="100000">
-              <a:schemeClr val="phClr">
-                <a:shade val="30000"/>
-                <a:satMod val="200000"/>
-              </a:schemeClr>
-            </a:gs>
-          </a:gsLst>
-          <a:path path="circle">
-            <a:fillToRect l="50000" t="50000" r="50000" b="50000"/>
-          </a:path>
-        </a:gradFill>
-      </a:bgFillStyleLst>
-    </a:fmtScheme>
-  </a:themeElements>
-</a:theme>
 </file>
--- a/master_template.pptx
+++ b/master_template.pptx
@@ -979,7 +979,7 @@
       </p:grpSpPr>
       <p:sp>
         <p:nvSpPr>
-          <p:cNvPr id="107" name="Google Shape;107;p11:notes"/>
+          <p:cNvPr id="107" name="Google Shape;107;p6:notes"/>
           <p:cNvSpPr/>
           <p:nvPr>
             <p:ph idx="2" type="sldImg"/>
@@ -1024,7 +1024,7 @@
       </p:sp>
       <p:sp>
         <p:nvSpPr>
-          <p:cNvPr id="108" name="Google Shape;108;p11:notes"/>
+          <p:cNvPr id="108" name="Google Shape;108;p6:notes"/>
           <p:cNvSpPr txBox="1"/>
           <p:nvPr>
             <p:ph idx="1" type="body"/>
@@ -1213,7 +1213,7 @@
       </p:grpSpPr>
       <p:sp>
         <p:nvSpPr>
-          <p:cNvPr id="119" name="Google Shape;119;p13:notes"/>
+          <p:cNvPr id="119" name="Google Shape;119;p14:notes"/>
           <p:cNvSpPr/>
           <p:nvPr>
             <p:ph idx="2" type="sldImg"/>
@@ -1258,7 +1258,7 @@
       </p:sp>
       <p:sp>
         <p:nvSpPr>
-          <p:cNvPr id="120" name="Google Shape;120;p13:notes"/>
+          <p:cNvPr id="120" name="Google Shape;120;p14:notes"/>
           <p:cNvSpPr txBox="1"/>
           <p:nvPr>
             <p:ph idx="1" type="body"/>
@@ -1330,7 +1330,7 @@
       </p:grpSpPr>
       <p:sp>
         <p:nvSpPr>
-          <p:cNvPr id="125" name="Google Shape;125;p14:notes"/>
+          <p:cNvPr id="125" name="Google Shape;125;p16:notes"/>
           <p:cNvSpPr/>
           <p:nvPr>
             <p:ph idx="2" type="sldImg"/>
@@ -1375,7 +1375,7 @@
       </p:sp>
       <p:sp>
         <p:nvSpPr>
-          <p:cNvPr id="126" name="Google Shape;126;p14:notes"/>
+          <p:cNvPr id="126" name="Google Shape;126;p16:notes"/>
           <p:cNvSpPr txBox="1"/>
           <p:nvPr>
             <p:ph idx="1" type="body"/>
@@ -1564,7 +1564,7 @@
       </p:grpSpPr>
       <p:sp>
         <p:nvSpPr>
-          <p:cNvPr id="141" name="Google Shape;141;p16:notes"/>
+          <p:cNvPr id="141" name="Google Shape;141;p13:notes"/>
           <p:cNvSpPr/>
           <p:nvPr>
             <p:ph idx="2" type="sldImg"/>
@@ -1609,7 +1609,7 @@
       </p:sp>
       <p:sp>
         <p:nvSpPr>
-          <p:cNvPr id="142" name="Google Shape;142;p16:notes"/>
+          <p:cNvPr id="142" name="Google Shape;142;p13:notes"/>
           <p:cNvSpPr txBox="1"/>
           <p:nvPr>
             <p:ph idx="1" type="body"/>
@@ -1915,7 +1915,7 @@
       </p:grpSpPr>
       <p:sp>
         <p:nvSpPr>
-          <p:cNvPr id="65" name="Google Shape;65;p3:notes"/>
+          <p:cNvPr id="65" name="Google Shape;65;p7:notes"/>
           <p:cNvSpPr/>
           <p:nvPr>
             <p:ph idx="2" type="sldImg"/>
@@ -1960,7 +1960,7 @@
       </p:sp>
       <p:sp>
         <p:nvSpPr>
-          <p:cNvPr id="66" name="Google Shape;66;p3:notes"/>
+          <p:cNvPr id="66" name="Google Shape;66;p7:notes"/>
           <p:cNvSpPr txBox="1"/>
           <p:nvPr>
             <p:ph idx="1" type="body"/>
@@ -2032,7 +2032,7 @@
       </p:grpSpPr>
       <p:sp>
         <p:nvSpPr>
-          <p:cNvPr id="71" name="Google Shape;71;p4:notes"/>
+          <p:cNvPr id="71" name="Google Shape;71;p9:notes"/>
           <p:cNvSpPr/>
           <p:nvPr>
             <p:ph idx="2" type="sldImg"/>
@@ -2077,7 +2077,7 @@
       </p:sp>
       <p:sp>
         <p:nvSpPr>
-          <p:cNvPr id="72" name="Google Shape;72;p4:notes"/>
+          <p:cNvPr id="72" name="Google Shape;72;p9:notes"/>
           <p:cNvSpPr txBox="1"/>
           <p:nvPr>
             <p:ph idx="1" type="body"/>
@@ -2149,7 +2149,7 @@
       </p:grpSpPr>
       <p:sp>
         <p:nvSpPr>
-          <p:cNvPr id="77" name="Google Shape;77;p5:notes"/>
+          <p:cNvPr id="77" name="Google Shape;77;p11:notes"/>
           <p:cNvSpPr/>
           <p:nvPr>
             <p:ph idx="2" type="sldImg"/>
@@ -2194,7 +2194,7 @@
       </p:sp>
       <p:sp>
         <p:nvSpPr>
-          <p:cNvPr id="78" name="Google Shape;78;p5:notes"/>
+          <p:cNvPr id="78" name="Google Shape;78;p11:notes"/>
           <p:cNvSpPr txBox="1"/>
           <p:nvPr>
             <p:ph idx="1" type="body"/>
@@ -2266,7 +2266,7 @@
       </p:grpSpPr>
       <p:sp>
         <p:nvSpPr>
-          <p:cNvPr id="83" name="Google Shape;83;p6:notes"/>
+          <p:cNvPr id="83" name="Google Shape;83;p3:notes"/>
           <p:cNvSpPr/>
           <p:nvPr>
             <p:ph idx="2" type="sldImg"/>
@@ -2311,7 +2311,7 @@
       </p:sp>
       <p:sp>
         <p:nvSpPr>
-          <p:cNvPr id="84" name="Google Shape;84;p6:notes"/>
+          <p:cNvPr id="84" name="Google Shape;84;p3:notes"/>
           <p:cNvSpPr txBox="1"/>
           <p:nvPr>
             <p:ph idx="1" type="body"/>
@@ -2383,7 +2383,7 @@
       </p:grpSpPr>
       <p:sp>
         <p:nvSpPr>
-          <p:cNvPr id="89" name="Google Shape;89;p7:notes"/>
+          <p:cNvPr id="89" name="Google Shape;89;p4:notes"/>
           <p:cNvSpPr/>
           <p:nvPr>
             <p:ph idx="2" type="sldImg"/>
@@ -2428,7 +2428,7 @@
       </p:sp>
       <p:sp>
         <p:nvSpPr>
-          <p:cNvPr id="90" name="Google Shape;90;p7:notes"/>
+          <p:cNvPr id="90" name="Google Shape;90;p4:notes"/>
           <p:cNvSpPr txBox="1"/>
           <p:nvPr>
             <p:ph idx="1" type="body"/>
@@ -2500,7 +2500,7 @@
       </p:grpSpPr>
       <p:sp>
         <p:nvSpPr>
-          <p:cNvPr id="95" name="Google Shape;95;p9:notes"/>
+          <p:cNvPr id="95" name="Google Shape;95;p10:notes"/>
           <p:cNvSpPr/>
           <p:nvPr>
             <p:ph idx="2" type="sldImg"/>
@@ -2545,7 +2545,7 @@
       </p:sp>
       <p:sp>
         <p:nvSpPr>
-          <p:cNvPr id="96" name="Google Shape;96;p9:notes"/>
+          <p:cNvPr id="96" name="Google Shape;96;p10:notes"/>
           <p:cNvSpPr txBox="1"/>
           <p:nvPr>
             <p:ph idx="1" type="body"/>
@@ -2617,7 +2617,7 @@
       </p:grpSpPr>
       <p:sp>
         <p:nvSpPr>
-          <p:cNvPr id="101" name="Google Shape;101;p10:notes"/>
+          <p:cNvPr id="101" name="Google Shape;101;p5:notes"/>
           <p:cNvSpPr/>
           <p:nvPr>
             <p:ph idx="2" type="sldImg"/>
@@ -2662,7 +2662,7 @@
       </p:sp>
       <p:sp>
         <p:nvSpPr>
-          <p:cNvPr id="102" name="Google Shape;102;p10:notes"/>
+          <p:cNvPr id="102" name="Google Shape;102;p5:notes"/>
           <p:cNvSpPr txBox="1"/>
           <p:nvPr>
             <p:ph idx="1" type="body"/>
@@ -10931,7 +10931,7 @@
             </a:pPr>
             <a:r>
               <a:rPr lang="en-GB"/>
-              <a:t>Industry Risks</a:t>
+              <a:t>Corporate Governance</a:t>
             </a:r>
             <a:endParaRPr/>
           </a:p>
@@ -10945,8 +10945,8 @@
         </p:nvSpPr>
         <p:spPr>
           <a:xfrm>
-            <a:off x="219150" y="623600"/>
-            <a:ext cx="8705700" cy="276900"/>
+            <a:off x="138289" y="646974"/>
+            <a:ext cx="8867400" cy="276900"/>
           </a:xfrm>
           <a:prstGeom prst="rect">
             <a:avLst/>
@@ -10984,7 +10984,31 @@
                 <a:cs typeface="Calibri"/>
                 <a:sym typeface="Calibri"/>
               </a:rPr>
-              <a:t>{{industry_risk}}</a:t>
+              <a:t>{{</a:t>
+            </a:r>
+            <a:r>
+              <a:rPr lang="en-GB" sz="1200">
+                <a:solidFill>
+                  <a:schemeClr val="dk1"/>
+                </a:solidFill>
+                <a:latin typeface="Calibri"/>
+                <a:ea typeface="Calibri"/>
+                <a:cs typeface="Calibri"/>
+                <a:sym typeface="Calibri"/>
+              </a:rPr>
+              <a:t>cs_corporate_governance</a:t>
+            </a:r>
+            <a:r>
+              <a:rPr i="0" lang="en-GB" sz="1200" u="none" cap="none" strike="noStrike">
+                <a:solidFill>
+                  <a:schemeClr val="dk1"/>
+                </a:solidFill>
+                <a:latin typeface="Calibri"/>
+                <a:ea typeface="Calibri"/>
+                <a:cs typeface="Calibri"/>
+                <a:sym typeface="Calibri"/>
+              </a:rPr>
+              <a:t>}}</a:t>
             </a:r>
             <a:endParaRPr i="0" sz="1200" u="none" cap="none" strike="noStrike">
               <a:solidFill>
@@ -11227,7 +11251,7 @@
             </a:pPr>
             <a:r>
               <a:rPr lang="en-GB"/>
-              <a:t>Entry, Review &amp; Exit Strategy</a:t>
+              <a:t>Scenario Analysis</a:t>
             </a:r>
             <a:endParaRPr/>
           </a:p>
@@ -11241,7 +11265,7 @@
         </p:nvSpPr>
         <p:spPr>
           <a:xfrm>
-            <a:off x="219150" y="652250"/>
+            <a:off x="219150" y="623600"/>
             <a:ext cx="8705700" cy="276900"/>
           </a:xfrm>
           <a:prstGeom prst="rect">
@@ -11292,7 +11316,7 @@
                 <a:cs typeface="Calibri"/>
                 <a:sym typeface="Calibri"/>
               </a:rPr>
-              <a:t>cs_entry_review_exit_strategy</a:t>
+              <a:t>cs_scenario_analysis</a:t>
             </a:r>
             <a:r>
               <a:rPr i="0" lang="en-GB" sz="1200" u="none" cap="none" strike="noStrike">
@@ -11387,7 +11411,7 @@
             </a:pPr>
             <a:r>
               <a:rPr lang="en-GB"/>
-              <a:t>Scenario Analysis</a:t>
+              <a:t>Story in Charts</a:t>
             </a:r>
             <a:endParaRPr/>
           </a:p>
@@ -11401,8 +11425,8 @@
         </p:nvSpPr>
         <p:spPr>
           <a:xfrm>
-            <a:off x="219150" y="623600"/>
-            <a:ext cx="8705700" cy="276900"/>
+            <a:off x="2562578" y="1636889"/>
+            <a:ext cx="1495800" cy="276900"/>
           </a:xfrm>
           <a:prstGeom prst="rect">
             <a:avLst/>
@@ -11428,43 +11452,24 @@
               <a:spcAft>
                 <a:spcPts val="0"/>
               </a:spcAft>
+              <a:buClr>
+                <a:srgbClr val="000000"/>
+              </a:buClr>
+              <a:buSzPts val="1400"/>
+              <a:buFont typeface="Arial"/>
               <a:buNone/>
             </a:pPr>
             <a:r>
               <a:rPr i="0" lang="en-GB" sz="1200" u="none" cap="none" strike="noStrike">
                 <a:solidFill>
-                  <a:schemeClr val="dk1"/>
+                  <a:srgbClr val="000000"/>
                 </a:solidFill>
                 <a:latin typeface="Calibri"/>
                 <a:ea typeface="Calibri"/>
                 <a:cs typeface="Calibri"/>
                 <a:sym typeface="Calibri"/>
               </a:rPr>
-              <a:t>{{</a:t>
-            </a:r>
-            <a:r>
-              <a:rPr lang="en-GB" sz="1200">
-                <a:solidFill>
-                  <a:schemeClr val="dk1"/>
-                </a:solidFill>
-                <a:latin typeface="Calibri"/>
-                <a:ea typeface="Calibri"/>
-                <a:cs typeface="Calibri"/>
-                <a:sym typeface="Calibri"/>
-              </a:rPr>
-              <a:t>cs_scenario_analysis</a:t>
-            </a:r>
-            <a:r>
-              <a:rPr i="0" lang="en-GB" sz="1200" u="none" cap="none" strike="noStrike">
-                <a:solidFill>
-                  <a:schemeClr val="dk1"/>
-                </a:solidFill>
-                <a:latin typeface="Calibri"/>
-                <a:ea typeface="Calibri"/>
-                <a:cs typeface="Calibri"/>
-                <a:sym typeface="Calibri"/>
-              </a:rPr>
-              <a:t>}}</a:t>
+              <a:t>{{chart_custom}}</a:t>
             </a:r>
             <a:endParaRPr i="0" sz="1200" u="none" cap="none" strike="noStrike">
               <a:solidFill>
@@ -11901,7 +11906,7 @@
             </a:pPr>
             <a:r>
               <a:rPr lang="en-GB"/>
-              <a:t>Story in Charts</a:t>
+              <a:t>Entry, Review &amp; Exit Strategy</a:t>
             </a:r>
             <a:endParaRPr/>
           </a:p>
@@ -11915,8 +11920,8 @@
         </p:nvSpPr>
         <p:spPr>
           <a:xfrm>
-            <a:off x="2562578" y="1636889"/>
-            <a:ext cx="1495800" cy="276900"/>
+            <a:off x="219150" y="652250"/>
+            <a:ext cx="8705700" cy="276900"/>
           </a:xfrm>
           <a:prstGeom prst="rect">
             <a:avLst/>
@@ -11942,24 +11947,43 @@
               <a:spcAft>
                 <a:spcPts val="0"/>
               </a:spcAft>
-              <a:buClr>
-                <a:srgbClr val="000000"/>
-              </a:buClr>
-              <a:buSzPts val="1400"/>
-              <a:buFont typeface="Arial"/>
               <a:buNone/>
             </a:pPr>
             <a:r>
               <a:rPr i="0" lang="en-GB" sz="1200" u="none" cap="none" strike="noStrike">
                 <a:solidFill>
-                  <a:srgbClr val="000000"/>
+                  <a:schemeClr val="dk1"/>
                 </a:solidFill>
                 <a:latin typeface="Calibri"/>
                 <a:ea typeface="Calibri"/>
                 <a:cs typeface="Calibri"/>
                 <a:sym typeface="Calibri"/>
               </a:rPr>
-              <a:t>{{chart_custom}}</a:t>
+              <a:t>{{</a:t>
+            </a:r>
+            <a:r>
+              <a:rPr lang="en-GB" sz="1200">
+                <a:solidFill>
+                  <a:schemeClr val="dk1"/>
+                </a:solidFill>
+                <a:latin typeface="Calibri"/>
+                <a:ea typeface="Calibri"/>
+                <a:cs typeface="Calibri"/>
+                <a:sym typeface="Calibri"/>
+              </a:rPr>
+              <a:t>cs_entry_review_exit_strategy</a:t>
+            </a:r>
+            <a:r>
+              <a:rPr i="0" lang="en-GB" sz="1200" u="none" cap="none" strike="noStrike">
+                <a:solidFill>
+                  <a:schemeClr val="dk1"/>
+                </a:solidFill>
+                <a:latin typeface="Calibri"/>
+                <a:ea typeface="Calibri"/>
+                <a:cs typeface="Calibri"/>
+                <a:sym typeface="Calibri"/>
+              </a:rPr>
+              <a:t>}}</a:t>
             </a:r>
             <a:endParaRPr i="0" sz="1200" u="none" cap="none" strike="noStrike">
               <a:solidFill>
@@ -13158,7 +13182,7 @@
             </a:pPr>
             <a:r>
               <a:rPr lang="en-GB"/>
-              <a:t>Company Background</a:t>
+              <a:t>Industry Overview</a:t>
             </a:r>
             <a:endParaRPr/>
           </a:p>
@@ -13172,8 +13196,8 @@
         </p:nvSpPr>
         <p:spPr>
           <a:xfrm>
-            <a:off x="138289" y="626272"/>
-            <a:ext cx="8867400" cy="276900"/>
+            <a:off x="90904" y="646084"/>
+            <a:ext cx="8962200" cy="276900"/>
           </a:xfrm>
           <a:prstGeom prst="rect">
             <a:avLst/>
@@ -13211,7 +13235,7 @@
                 <a:cs typeface="Calibri"/>
                 <a:sym typeface="Calibri"/>
               </a:rPr>
-              <a:t> {{company_background}}</a:t>
+              <a:t>{{industry_overview}}</a:t>
             </a:r>
             <a:endParaRPr i="0" sz="1200" u="none" cap="none" strike="noStrike">
               <a:solidFill>
@@ -13294,7 +13318,7 @@
             </a:pPr>
             <a:r>
               <a:rPr lang="en-GB"/>
-              <a:t>Business Model</a:t>
+              <a:t>Key Industry Tailwinds</a:t>
             </a:r>
             <a:endParaRPr/>
           </a:p>
@@ -13308,7 +13332,7 @@
         </p:nvSpPr>
         <p:spPr>
           <a:xfrm>
-            <a:off x="138303" y="631297"/>
+            <a:off x="138289" y="654947"/>
             <a:ext cx="8867400" cy="276900"/>
           </a:xfrm>
           <a:prstGeom prst="rect">
@@ -13340,14 +13364,14 @@
             <a:r>
               <a:rPr i="0" lang="en-GB" sz="1200" u="none" cap="none" strike="noStrike">
                 <a:solidFill>
-                  <a:schemeClr val="dk1"/>
+                  <a:srgbClr val="000000"/>
                 </a:solidFill>
                 <a:latin typeface="Calibri"/>
                 <a:ea typeface="Calibri"/>
                 <a:cs typeface="Calibri"/>
                 <a:sym typeface="Calibri"/>
               </a:rPr>
-              <a:t>{{business_model}}</a:t>
+              <a:t>{{industry_tailwinds}}</a:t>
             </a:r>
             <a:endParaRPr i="0" sz="1200" u="none" cap="none" strike="noStrike">
               <a:solidFill>
@@ -13430,7 +13454,7 @@
             </a:pPr>
             <a:r>
               <a:rPr lang="en-GB"/>
-              <a:t>Management Analysis</a:t>
+              <a:t>Industry Risks</a:t>
             </a:r>
             <a:endParaRPr/>
           </a:p>
@@ -13444,8 +13468,8 @@
         </p:nvSpPr>
         <p:spPr>
           <a:xfrm>
-            <a:off x="138289" y="632649"/>
-            <a:ext cx="8867400" cy="276900"/>
+            <a:off x="219150" y="623600"/>
+            <a:ext cx="8705700" cy="276900"/>
           </a:xfrm>
           <a:prstGeom prst="rect">
             <a:avLst/>
@@ -13483,7 +13507,7 @@
                 <a:cs typeface="Calibri"/>
                 <a:sym typeface="Calibri"/>
               </a:rPr>
-              <a:t>{{management_analysis}}</a:t>
+              <a:t>{{industry_risk}}</a:t>
             </a:r>
             <a:endParaRPr i="0" sz="1200" u="none" cap="none" strike="noStrike">
               <a:solidFill>
@@ -13566,7 +13590,7 @@
             </a:pPr>
             <a:r>
               <a:rPr lang="en-GB"/>
-              <a:t>Corporate Governance</a:t>
+              <a:t>Company Background</a:t>
             </a:r>
             <a:endParaRPr/>
           </a:p>
@@ -13580,7 +13604,7 @@
         </p:nvSpPr>
         <p:spPr>
           <a:xfrm>
-            <a:off x="138289" y="646974"/>
+            <a:off x="138289" y="626272"/>
             <a:ext cx="8867400" cy="276900"/>
           </a:xfrm>
           <a:prstGeom prst="rect">
@@ -13619,31 +13643,7 @@
                 <a:cs typeface="Calibri"/>
                 <a:sym typeface="Calibri"/>
               </a:rPr>
-              <a:t>{{</a:t>
-            </a:r>
-            <a:r>
-              <a:rPr lang="en-GB" sz="1200">
-                <a:solidFill>
-                  <a:schemeClr val="dk1"/>
-                </a:solidFill>
-                <a:latin typeface="Calibri"/>
-                <a:ea typeface="Calibri"/>
-                <a:cs typeface="Calibri"/>
-                <a:sym typeface="Calibri"/>
-              </a:rPr>
-              <a:t>cs_corporate_governance</a:t>
-            </a:r>
-            <a:r>
-              <a:rPr i="0" lang="en-GB" sz="1200" u="none" cap="none" strike="noStrike">
-                <a:solidFill>
-                  <a:schemeClr val="dk1"/>
-                </a:solidFill>
-                <a:latin typeface="Calibri"/>
-                <a:ea typeface="Calibri"/>
-                <a:cs typeface="Calibri"/>
-                <a:sym typeface="Calibri"/>
-              </a:rPr>
-              <a:t>}}</a:t>
+              <a:t> {{company_background}}</a:t>
             </a:r>
             <a:endParaRPr i="0" sz="1200" u="none" cap="none" strike="noStrike">
               <a:solidFill>
@@ -13726,7 +13726,7 @@
             </a:pPr>
             <a:r>
               <a:rPr lang="en-GB"/>
-              <a:t>Industry Overview</a:t>
+              <a:t>Business Model</a:t>
             </a:r>
             <a:endParaRPr/>
           </a:p>
@@ -13740,8 +13740,8 @@
         </p:nvSpPr>
         <p:spPr>
           <a:xfrm>
-            <a:off x="90904" y="646084"/>
-            <a:ext cx="8962200" cy="276900"/>
+            <a:off x="138303" y="631297"/>
+            <a:ext cx="8867400" cy="276900"/>
           </a:xfrm>
           <a:prstGeom prst="rect">
             <a:avLst/>
@@ -13779,7 +13779,7 @@
                 <a:cs typeface="Calibri"/>
                 <a:sym typeface="Calibri"/>
               </a:rPr>
-              <a:t>{{industry_overview}}</a:t>
+              <a:t>{{business_model}}</a:t>
             </a:r>
             <a:endParaRPr i="0" sz="1200" u="none" cap="none" strike="noStrike">
               <a:solidFill>
@@ -13862,7 +13862,7 @@
             </a:pPr>
             <a:r>
               <a:rPr lang="en-GB"/>
-              <a:t>Key Industry Tailwinds</a:t>
+              <a:t>Demand Drivers</a:t>
             </a:r>
             <a:endParaRPr/>
           </a:p>
@@ -13876,8 +13876,8 @@
         </p:nvSpPr>
         <p:spPr>
           <a:xfrm>
-            <a:off x="138289" y="654947"/>
-            <a:ext cx="8867400" cy="276900"/>
+            <a:off x="161850" y="646625"/>
+            <a:ext cx="8820300" cy="276900"/>
           </a:xfrm>
           <a:prstGeom prst="rect">
             <a:avLst/>
@@ -13908,14 +13908,14 @@
             <a:r>
               <a:rPr i="0" lang="en-GB" sz="1200" u="none" cap="none" strike="noStrike">
                 <a:solidFill>
-                  <a:srgbClr val="000000"/>
+                  <a:schemeClr val="dk1"/>
                 </a:solidFill>
                 <a:latin typeface="Calibri"/>
                 <a:ea typeface="Calibri"/>
                 <a:cs typeface="Calibri"/>
                 <a:sym typeface="Calibri"/>
               </a:rPr>
-              <a:t>{{industry_tailwinds}}</a:t>
+              <a:t>{{demand_drivers}}</a:t>
             </a:r>
             <a:endParaRPr i="0" sz="1200" u="none" cap="none" strike="noStrike">
               <a:solidFill>
@@ -13998,7 +13998,7 @@
             </a:pPr>
             <a:r>
               <a:rPr lang="en-GB"/>
-              <a:t>Demand Drivers</a:t>
+              <a:t>Management Analysis</a:t>
             </a:r>
             <a:endParaRPr/>
           </a:p>
@@ -14012,8 +14012,8 @@
         </p:nvSpPr>
         <p:spPr>
           <a:xfrm>
-            <a:off x="161850" y="646625"/>
-            <a:ext cx="8820300" cy="276900"/>
+            <a:off x="138289" y="632649"/>
+            <a:ext cx="8867400" cy="276900"/>
           </a:xfrm>
           <a:prstGeom prst="rect">
             <a:avLst/>
@@ -14051,7 +14051,7 @@
                 <a:cs typeface="Calibri"/>
                 <a:sym typeface="Calibri"/>
               </a:rPr>
-              <a:t>{{demand_drivers}}</a:t>
+              <a:t>{{management_analysis}}</a:t>
             </a:r>
             <a:endParaRPr i="0" sz="1200" u="none" cap="none" strike="noStrike">
               <a:solidFill>
@@ -14074,6 +14074,285 @@
 </file>
 
 <file path=ppt/theme/theme1.xml><?xml version="1.0" encoding="utf-8"?>
+<a:theme xmlns:a="http://schemas.openxmlformats.org/drawingml/2006/main" xmlns:r="http://schemas.openxmlformats.org/officeDocument/2006/relationships">
+  <a:themeElements>
+    <a:clrScheme name="Default">
+      <a:dk1>
+        <a:srgbClr val="000000"/>
+      </a:dk1>
+      <a:lt1>
+        <a:srgbClr val="FFFFFF"/>
+      </a:lt1>
+      <a:dk2>
+        <a:srgbClr val="158158"/>
+      </a:dk2>
+      <a:lt2>
+        <a:srgbClr val="F3F3F3"/>
+      </a:lt2>
+      <a:accent1>
+        <a:srgbClr val="058DC7"/>
+      </a:accent1>
+      <a:accent2>
+        <a:srgbClr val="50B432"/>
+      </a:accent2>
+      <a:accent3>
+        <a:srgbClr val="ED561B"/>
+      </a:accent3>
+      <a:accent4>
+        <a:srgbClr val="EDEF00"/>
+      </a:accent4>
+      <a:accent5>
+        <a:srgbClr val="24CBE5"/>
+      </a:accent5>
+      <a:accent6>
+        <a:srgbClr val="64E572"/>
+      </a:accent6>
+      <a:hlink>
+        <a:srgbClr val="2200CC"/>
+      </a:hlink>
+      <a:folHlink>
+        <a:srgbClr val="551A8B"/>
+      </a:folHlink>
+    </a:clrScheme>
+    <a:fontScheme name="Office">
+      <a:majorFont>
+        <a:latin typeface="Arial"/>
+        <a:ea typeface=""/>
+        <a:cs typeface=""/>
+        <a:font script="Jpan" typeface="ＭＳ Ｐゴシック"/>
+        <a:font script="Hang" typeface="맑은 고딕"/>
+        <a:font script="Hans" typeface="宋体"/>
+        <a:font script="Hant" typeface="新細明體"/>
+        <a:font script="Arab" typeface="Times New Roman"/>
+        <a:font script="Hebr" typeface="Times New Roman"/>
+        <a:font script="Thai" typeface="Angsana New"/>
+        <a:font script="Ethi" typeface="Nyala"/>
+        <a:font script="Beng" typeface="Vrinda"/>
+        <a:font script="Gujr" typeface="Shruti"/>
+        <a:font script="Khmr" typeface="MoolBoran"/>
+        <a:font script="Knda" typeface="Tunga"/>
+        <a:font script="Guru" typeface="Raavi"/>
+        <a:font script="Cans" typeface="Euphemia"/>
+        <a:font script="Cher" typeface="Plantagenet Cherokee"/>
+        <a:font script="Yiii" typeface="Microsoft Yi Baiti"/>
+        <a:font script="Tibt" typeface="Microsoft Himalaya"/>
+        <a:font script="Thaa" typeface="MV Boli"/>
+        <a:font script="Deva" typeface="Mangal"/>
+        <a:font script="Telu" typeface="Gautami"/>
+        <a:font script="Taml" typeface="Latha"/>
+        <a:font script="Syrc" typeface="Estrangelo Edessa"/>
+        <a:font script="Orya" typeface="Kalinga"/>
+        <a:font script="Mlym" typeface="Kartika"/>
+        <a:font script="Laoo" typeface="DokChampa"/>
+        <a:font script="Sinh" typeface="Iskoola Pota"/>
+        <a:font script="Mong" typeface="Mongolian Baiti"/>
+        <a:font script="Viet" typeface="Times New Roman"/>
+        <a:font script="Uigh" typeface="Microsoft Uighur"/>
+        <a:font script="Geor" typeface="Sylfaen"/>
+      </a:majorFont>
+      <a:minorFont>
+        <a:latin typeface="Arial"/>
+        <a:ea typeface=""/>
+        <a:cs typeface=""/>
+        <a:font script="Jpan" typeface="ＭＳ Ｐゴシック"/>
+        <a:font script="Hang" typeface="맑은 고딕"/>
+        <a:font script="Hans" typeface="宋体"/>
+        <a:font script="Hant" typeface="新細明體"/>
+        <a:font script="Arab" typeface="Arial"/>
+        <a:font script="Hebr" typeface="Arial"/>
+        <a:font script="Thai" typeface="Cordia New"/>
+        <a:font script="Ethi" typeface="Nyala"/>
+        <a:font script="Beng" typeface="Vrinda"/>
+        <a:font script="Gujr" typeface="Shruti"/>
+        <a:font script="Khmr" typeface="DaunPenh"/>
+        <a:font script="Knda" typeface="Tunga"/>
+        <a:font script="Guru" typeface="Raavi"/>
+        <a:font script="Cans" typeface="Euphemia"/>
+        <a:font script="Cher" typeface="Plantagenet Cherokee"/>
+        <a:font script="Yiii" typeface="Microsoft Yi Baiti"/>
+        <a:font script="Tibt" typeface="Microsoft Himalaya"/>
+        <a:font script="Thaa" typeface="MV Boli"/>
+        <a:font script="Deva" typeface="Mangal"/>
+        <a:font script="Telu" typeface="Gautami"/>
+        <a:font script="Taml" typeface="Latha"/>
+        <a:font script="Syrc" typeface="Estrangelo Edessa"/>
+        <a:font script="Orya" typeface="Kalinga"/>
+        <a:font script="Mlym" typeface="Kartika"/>
+        <a:font script="Laoo" typeface="DokChampa"/>
+        <a:font script="Sinh" typeface="Iskoola Pota"/>
+        <a:font script="Mong" typeface="Mongolian Baiti"/>
+        <a:font script="Viet" typeface="Arial"/>
+        <a:font script="Uigh" typeface="Microsoft Uighur"/>
+        <a:font script="Geor" typeface="Sylfaen"/>
+      </a:minorFont>
+    </a:fontScheme>
+    <a:fmtScheme name="Office">
+      <a:fillStyleLst>
+        <a:solidFill>
+          <a:schemeClr val="phClr"/>
+        </a:solidFill>
+        <a:gradFill rotWithShape="1">
+          <a:gsLst>
+            <a:gs pos="0">
+              <a:schemeClr val="phClr">
+                <a:tint val="50000"/>
+                <a:satMod val="300000"/>
+              </a:schemeClr>
+            </a:gs>
+            <a:gs pos="35000">
+              <a:schemeClr val="phClr">
+                <a:tint val="37000"/>
+                <a:satMod val="300000"/>
+              </a:schemeClr>
+            </a:gs>
+            <a:gs pos="100000">
+              <a:schemeClr val="phClr">
+                <a:tint val="15000"/>
+                <a:satMod val="350000"/>
+              </a:schemeClr>
+            </a:gs>
+          </a:gsLst>
+          <a:lin ang="16200000" scaled="1"/>
+        </a:gradFill>
+        <a:gradFill rotWithShape="1">
+          <a:gsLst>
+            <a:gs pos="0">
+              <a:schemeClr val="phClr">
+                <a:tint val="100000"/>
+                <a:shade val="100000"/>
+                <a:satMod val="130000"/>
+              </a:schemeClr>
+            </a:gs>
+            <a:gs pos="100000">
+              <a:schemeClr val="phClr">
+                <a:tint val="50000"/>
+                <a:shade val="100000"/>
+                <a:satMod val="350000"/>
+              </a:schemeClr>
+            </a:gs>
+          </a:gsLst>
+          <a:lin ang="16200000" scaled="0"/>
+        </a:gradFill>
+      </a:fillStyleLst>
+      <a:lnStyleLst>
+        <a:ln w="9525" cap="flat" cmpd="sng" algn="ctr">
+          <a:solidFill>
+            <a:schemeClr val="phClr">
+              <a:shade val="95000"/>
+              <a:satMod val="105000"/>
+            </a:schemeClr>
+          </a:solidFill>
+          <a:prstDash val="solid"/>
+        </a:ln>
+        <a:ln w="25400" cap="flat" cmpd="sng" algn="ctr">
+          <a:solidFill>
+            <a:schemeClr val="phClr"/>
+          </a:solidFill>
+          <a:prstDash val="solid"/>
+        </a:ln>
+        <a:ln w="38100" cap="flat" cmpd="sng" algn="ctr">
+          <a:solidFill>
+            <a:schemeClr val="phClr"/>
+          </a:solidFill>
+          <a:prstDash val="solid"/>
+        </a:ln>
+      </a:lnStyleLst>
+      <a:effectStyleLst>
+        <a:effectStyle>
+          <a:effectLst>
+            <a:outerShdw blurRad="40000" dist="20000" dir="5400000" rotWithShape="0">
+              <a:srgbClr val="000000">
+                <a:alpha val="38000"/>
+              </a:srgbClr>
+            </a:outerShdw>
+          </a:effectLst>
+        </a:effectStyle>
+        <a:effectStyle>
+          <a:effectLst>
+            <a:outerShdw blurRad="40000" dist="23000" dir="5400000" rotWithShape="0">
+              <a:srgbClr val="000000">
+                <a:alpha val="35000"/>
+              </a:srgbClr>
+            </a:outerShdw>
+          </a:effectLst>
+        </a:effectStyle>
+        <a:effectStyle>
+          <a:effectLst>
+            <a:outerShdw blurRad="40000" dist="23000" dir="5400000" rotWithShape="0">
+              <a:srgbClr val="000000">
+                <a:alpha val="35000"/>
+              </a:srgbClr>
+            </a:outerShdw>
+          </a:effectLst>
+          <a:scene3d>
+            <a:camera prst="orthographicFront">
+              <a:rot lat="0" lon="0" rev="0"/>
+            </a:camera>
+            <a:lightRig rig="threePt" dir="t">
+              <a:rot lat="0" lon="0" rev="1200000"/>
+            </a:lightRig>
+          </a:scene3d>
+          <a:sp3d>
+            <a:bevelT w="63500" h="25400"/>
+          </a:sp3d>
+        </a:effectStyle>
+      </a:effectStyleLst>
+      <a:bgFillStyleLst>
+        <a:solidFill>
+          <a:schemeClr val="phClr"/>
+        </a:solidFill>
+        <a:gradFill rotWithShape="1">
+          <a:gsLst>
+            <a:gs pos="0">
+              <a:schemeClr val="phClr">
+                <a:tint val="40000"/>
+                <a:satMod val="350000"/>
+              </a:schemeClr>
+            </a:gs>
+            <a:gs pos="40000">
+              <a:schemeClr val="phClr">
+                <a:tint val="45000"/>
+                <a:shade val="99000"/>
+                <a:satMod val="350000"/>
+              </a:schemeClr>
+            </a:gs>
+            <a:gs pos="100000">
+              <a:schemeClr val="phClr">
+                <a:shade val="20000"/>
+                <a:satMod val="255000"/>
+              </a:schemeClr>
+            </a:gs>
+          </a:gsLst>
+          <a:path path="circle">
+            <a:fillToRect l="50000" t="-80000" r="50000" b="180000"/>
+          </a:path>
+        </a:gradFill>
+        <a:gradFill rotWithShape="1">
+          <a:gsLst>
+            <a:gs pos="0">
+              <a:schemeClr val="phClr">
+                <a:tint val="80000"/>
+                <a:satMod val="300000"/>
+              </a:schemeClr>
+            </a:gs>
+            <a:gs pos="100000">
+              <a:schemeClr val="phClr">
+                <a:shade val="30000"/>
+                <a:satMod val="200000"/>
+              </a:schemeClr>
+            </a:gs>
+          </a:gsLst>
+          <a:path path="circle">
+            <a:fillToRect l="50000" t="50000" r="50000" b="50000"/>
+          </a:path>
+        </a:gradFill>
+      </a:bgFillStyleLst>
+    </a:fmtScheme>
+  </a:themeElements>
+</a:theme>
+</file>
+
+<file path=ppt/theme/theme2.xml><?xml version="1.0" encoding="utf-8"?>
 <a:theme xmlns:a="http://schemas.openxmlformats.org/drawingml/2006/main" xmlns:r="http://schemas.openxmlformats.org/officeDocument/2006/relationships" name="Simple Light">
   <a:themeElements>
     <a:clrScheme name="Simple Light">
@@ -14350,283 +14629,4 @@
     </a:fmtScheme>
   </a:themeElements>
 </a:theme>
-</file>
-
-<file path=ppt/theme/theme2.xml><?xml version="1.0" encoding="utf-8"?>
-<a:theme xmlns:a="http://schemas.openxmlformats.org/drawingml/2006/main" xmlns:r="http://schemas.openxmlformats.org/officeDocument/2006/relationships">
-  <a:themeElements>
-    <a:clrScheme name="Default">
-      <a:dk1>
-        <a:srgbClr val="000000"/>
-      </a:dk1>
-      <a:lt1>
-        <a:srgbClr val="FFFFFF"/>
-      </a:lt1>
-      <a:dk2>
-        <a:srgbClr val="158158"/>
-      </a:dk2>
-      <a:lt2>
-        <a:srgbClr val="F3F3F3"/>
-      </a:lt2>
-      <a:accent1>
-        <a:srgbClr val="058DC7"/>
-      </a:accent1>
-      <a:accent2>
-        <a:srgbClr val="50B432"/>
-      </a:accent2>
-      <a:accent3>
-        <a:srgbClr val="ED561B"/>
-      </a:accent3>
-      <a:accent4>
-        <a:srgbClr val="EDEF00"/>
-      </a:accent4>
-      <a:accent5>
-        <a:srgbClr val="24CBE5"/>
-      </a:accent5>
-      <a:accent6>
-        <a:srgbClr val="64E572"/>
-      </a:accent6>
-      <a:hlink>
-        <a:srgbClr val="2200CC"/>
-      </a:hlink>
-      <a:folHlink>
-        <a:srgbClr val="551A8B"/>
-      </a:folHlink>
-    </a:clrScheme>
-    <a:fontScheme name="Office">
-      <a:majorFont>
-        <a:latin typeface="Arial"/>
-        <a:ea typeface=""/>
-        <a:cs typeface=""/>
-        <a:font script="Jpan" typeface="ＭＳ Ｐゴシック"/>
-        <a:font script="Hang" typeface="맑은 고딕"/>
-        <a:font script="Hans" typeface="宋体"/>
-        <a:font script="Hant" typeface="新細明體"/>
-        <a:font script="Arab" typeface="Times New Roman"/>
-        <a:font script="Hebr" typeface="Times New Roman"/>
-        <a:font script="Thai" typeface="Angsana New"/>
-        <a:font script="Ethi" typeface="Nyala"/>
-        <a:font script="Beng" typeface="Vrinda"/>
-        <a:font script="Gujr" typeface="Shruti"/>
-        <a:font script="Khmr" typeface="MoolBoran"/>
-        <a:font script="Knda" typeface="Tunga"/>
-        <a:font script="Guru" typeface="Raavi"/>
-        <a:font script="Cans" typeface="Euphemia"/>
-        <a:font script="Cher" typeface="Plantagenet Cherokee"/>
-        <a:font script="Yiii" typeface="Microsoft Yi Baiti"/>
-        <a:font script="Tibt" typeface="Microsoft Himalaya"/>
-        <a:font script="Thaa" typeface="MV Boli"/>
-        <a:font script="Deva" typeface="Mangal"/>
-        <a:font script="Telu" typeface="Gautami"/>
-        <a:font script="Taml" typeface="Latha"/>
-        <a:font script="Syrc" typeface="Estrangelo Edessa"/>
-        <a:font script="Orya" typeface="Kalinga"/>
-        <a:font script="Mlym" typeface="Kartika"/>
-        <a:font script="Laoo" typeface="DokChampa"/>
-        <a:font script="Sinh" typeface="Iskoola Pota"/>
-        <a:font script="Mong" typeface="Mongolian Baiti"/>
-        <a:font script="Viet" typeface="Times New Roman"/>
-        <a:font script="Uigh" typeface="Microsoft Uighur"/>
-        <a:font script="Geor" typeface="Sylfaen"/>
-      </a:majorFont>
-      <a:minorFont>
-        <a:latin typeface="Arial"/>
-        <a:ea typeface=""/>
-        <a:cs typeface=""/>
-        <a:font script="Jpan" typeface="ＭＳ Ｐゴシック"/>
-        <a:font script="Hang" typeface="맑은 고딕"/>
-        <a:font script="Hans" typeface="宋体"/>
-        <a:font script="Hant" typeface="新細明體"/>
-        <a:font script="Arab" typeface="Arial"/>
-        <a:font script="Hebr" typeface="Arial"/>
-        <a:font script="Thai" typeface="Cordia New"/>
-        <a:font script="Ethi" typeface="Nyala"/>
-        <a:font script="Beng" typeface="Vrinda"/>
-        <a:font script="Gujr" typeface="Shruti"/>
-        <a:font script="Khmr" typeface="DaunPenh"/>
-        <a:font script="Knda" typeface="Tunga"/>
-        <a:font script="Guru" typeface="Raavi"/>
-        <a:font script="Cans" typeface="Euphemia"/>
-        <a:font script="Cher" typeface="Plantagenet Cherokee"/>
-        <a:font script="Yiii" typeface="Microsoft Yi Baiti"/>
-        <a:font script="Tibt" typeface="Microsoft Himalaya"/>
-        <a:font script="Thaa" typeface="MV Boli"/>
-        <a:font script="Deva" typeface="Mangal"/>
-        <a:font script="Telu" typeface="Gautami"/>
-        <a:font script="Taml" typeface="Latha"/>
-        <a:font script="Syrc" typeface="Estrangelo Edessa"/>
-        <a:font script="Orya" typeface="Kalinga"/>
-        <a:font script="Mlym" typeface="Kartika"/>
-        <a:font script="Laoo" typeface="DokChampa"/>
-        <a:font script="Sinh" typeface="Iskoola Pota"/>
-        <a:font script="Mong" typeface="Mongolian Baiti"/>
-        <a:font script="Viet" typeface="Arial"/>
-        <a:font script="Uigh" typeface="Microsoft Uighur"/>
-        <a:font script="Geor" typeface="Sylfaen"/>
-      </a:minorFont>
-    </a:fontScheme>
-    <a:fmtScheme name="Office">
-      <a:fillStyleLst>
-        <a:solidFill>
-          <a:schemeClr val="phClr"/>
-        </a:solidFill>
-        <a:gradFill rotWithShape="1">
-          <a:gsLst>
-            <a:gs pos="0">
-              <a:schemeClr val="phClr">
-                <a:tint val="50000"/>
-                <a:satMod val="300000"/>
-              </a:schemeClr>
-            </a:gs>
-            <a:gs pos="35000">
-              <a:schemeClr val="phClr">
-                <a:tint val="37000"/>
-                <a:satMod val="300000"/>
-              </a:schemeClr>
-            </a:gs>
-            <a:gs pos="100000">
-              <a:schemeClr val="phClr">
-                <a:tint val="15000"/>
-                <a:satMod val="350000"/>
-              </a:schemeClr>
-            </a:gs>
-          </a:gsLst>
-          <a:lin ang="16200000" scaled="1"/>
-        </a:gradFill>
-        <a:gradFill rotWithShape="1">
-          <a:gsLst>
-            <a:gs pos="0">
-              <a:schemeClr val="phClr">
-                <a:tint val="100000"/>
-                <a:shade val="100000"/>
-                <a:satMod val="130000"/>
-              </a:schemeClr>
-            </a:gs>
-            <a:gs pos="100000">
-              <a:schemeClr val="phClr">
-                <a:tint val="50000"/>
-                <a:shade val="100000"/>
-                <a:satMod val="350000"/>
-              </a:schemeClr>
-            </a:gs>
-          </a:gsLst>
-          <a:lin ang="16200000" scaled="0"/>
-        </a:gradFill>
-      </a:fillStyleLst>
-      <a:lnStyleLst>
-        <a:ln w="9525" cap="flat" cmpd="sng" algn="ctr">
-          <a:solidFill>
-            <a:schemeClr val="phClr">
-              <a:shade val="95000"/>
-              <a:satMod val="105000"/>
-            </a:schemeClr>
-          </a:solidFill>
-          <a:prstDash val="solid"/>
-        </a:ln>
-        <a:ln w="25400" cap="flat" cmpd="sng" algn="ctr">
-          <a:solidFill>
-            <a:schemeClr val="phClr"/>
-          </a:solidFill>
-          <a:prstDash val="solid"/>
-        </a:ln>
-        <a:ln w="38100" cap="flat" cmpd="sng" algn="ctr">
-          <a:solidFill>
-            <a:schemeClr val="phClr"/>
-          </a:solidFill>
-          <a:prstDash val="solid"/>
-        </a:ln>
-      </a:lnStyleLst>
-      <a:effectStyleLst>
-        <a:effectStyle>
-          <a:effectLst>
-            <a:outerShdw blurRad="40000" dist="20000" dir="5400000" rotWithShape="0">
-              <a:srgbClr val="000000">
-                <a:alpha val="38000"/>
-              </a:srgbClr>
-            </a:outerShdw>
-          </a:effectLst>
-        </a:effectStyle>
-        <a:effectStyle>
-          <a:effectLst>
-            <a:outerShdw blurRad="40000" dist="23000" dir="5400000" rotWithShape="0">
-              <a:srgbClr val="000000">
-                <a:alpha val="35000"/>
-              </a:srgbClr>
-            </a:outerShdw>
-          </a:effectLst>
-        </a:effectStyle>
-        <a:effectStyle>
-          <a:effectLst>
-            <a:outerShdw blurRad="40000" dist="23000" dir="5400000" rotWithShape="0">
-              <a:srgbClr val="000000">
-                <a:alpha val="35000"/>
-              </a:srgbClr>
-            </a:outerShdw>
-          </a:effectLst>
-          <a:scene3d>
-            <a:camera prst="orthographicFront">
-              <a:rot lat="0" lon="0" rev="0"/>
-            </a:camera>
-            <a:lightRig rig="threePt" dir="t">
-              <a:rot lat="0" lon="0" rev="1200000"/>
-            </a:lightRig>
-          </a:scene3d>
-          <a:sp3d>
-            <a:bevelT w="63500" h="25400"/>
-          </a:sp3d>
-        </a:effectStyle>
-      </a:effectStyleLst>
-      <a:bgFillStyleLst>
-        <a:solidFill>
-          <a:schemeClr val="phClr"/>
-        </a:solidFill>
-        <a:gradFill rotWithShape="1">
-          <a:gsLst>
-            <a:gs pos="0">
-              <a:schemeClr val="phClr">
-                <a:tint val="40000"/>
-                <a:satMod val="350000"/>
-              </a:schemeClr>
-            </a:gs>
-            <a:gs pos="40000">
-              <a:schemeClr val="phClr">
-                <a:tint val="45000"/>
-                <a:shade val="99000"/>
-                <a:satMod val="350000"/>
-              </a:schemeClr>
-            </a:gs>
-            <a:gs pos="100000">
-              <a:schemeClr val="phClr">
-                <a:shade val="20000"/>
-                <a:satMod val="255000"/>
-              </a:schemeClr>
-            </a:gs>
-          </a:gsLst>
-          <a:path path="circle">
-            <a:fillToRect l="50000" t="-80000" r="50000" b="180000"/>
-          </a:path>
-        </a:gradFill>
-        <a:gradFill rotWithShape="1">
-          <a:gsLst>
-            <a:gs pos="0">
-              <a:schemeClr val="phClr">
-                <a:tint val="80000"/>
-                <a:satMod val="300000"/>
-              </a:schemeClr>
-            </a:gs>
-            <a:gs pos="100000">
-              <a:schemeClr val="phClr">
-                <a:shade val="30000"/>
-                <a:satMod val="200000"/>
-              </a:schemeClr>
-            </a:gs>
-          </a:gsLst>
-          <a:path path="circle">
-            <a:fillToRect l="50000" t="50000" r="50000" b="50000"/>
-          </a:path>
-        </a:gradFill>
-      </a:bgFillStyleLst>
-    </a:fmtScheme>
-  </a:themeElements>
-</a:theme>
 </file>